--- a/chapter7/chapter7.pptx
+++ b/chapter7/chapter7.pptx
@@ -10435,10 +10435,12 @@
           </a:bodyPr>
           <a:lstStyle/>
           <a:p>
-            <a:pPr>
-              <a:spcAft>
-                <a:spcPts val="1000"/>
-              </a:spcAft>
+            <a:pPr lvl="0" marL="457200" indent="-228600">
+              <a:buFont typeface="Calibri"/>
+              <a:spcAft>
+                <a:spcPts val="1000"/>
+              </a:spcAft>
+              <a:buSzPct val="100000"/>
               <a:buChar char="•"/>
               <a:lnSpc>
                 <a:spcPts val="2200"/>
@@ -10455,10 +10457,12 @@
             </a:r>
           </a:p>
           <a:p>
-            <a:pPr>
-              <a:spcAft>
-                <a:spcPts val="1000"/>
-              </a:spcAft>
+            <a:pPr lvl="0" marL="457200" indent="-228600">
+              <a:buFont typeface="Calibri"/>
+              <a:spcAft>
+                <a:spcPts val="1000"/>
+              </a:spcAft>
+              <a:buSzPct val="100000"/>
               <a:buChar char="•"/>
               <a:lnSpc>
                 <a:spcPts val="2200"/>
@@ -10594,10 +10598,12 @@
           </a:bodyPr>
           <a:lstStyle/>
           <a:p>
-            <a:pPr>
-              <a:spcAft>
-                <a:spcPts val="1000"/>
-              </a:spcAft>
+            <a:pPr lvl="0" marL="457200" indent="-228600">
+              <a:buFont typeface="Calibri"/>
+              <a:spcAft>
+                <a:spcPts val="1000"/>
+              </a:spcAft>
+              <a:buSzPct val="100000"/>
               <a:buChar char="•"/>
               <a:lnSpc>
                 <a:spcPts val="2200"/>
@@ -10733,10 +10739,12 @@
           </a:bodyPr>
           <a:lstStyle/>
           <a:p>
-            <a:pPr>
-              <a:spcAft>
-                <a:spcPts val="1000"/>
-              </a:spcAft>
+            <a:pPr lvl="0" marL="457200" indent="-228600">
+              <a:buFont typeface="Calibri"/>
+              <a:spcAft>
+                <a:spcPts val="1000"/>
+              </a:spcAft>
+              <a:buSzPct val="100000"/>
               <a:buChar char="•"/>
               <a:lnSpc>
                 <a:spcPts val="2200"/>
@@ -10753,10 +10761,12 @@
             </a:r>
           </a:p>
           <a:p>
-            <a:pPr>
-              <a:spcAft>
-                <a:spcPts val="1000"/>
-              </a:spcAft>
+            <a:pPr lvl="0" marL="457200" indent="-228600">
+              <a:buFont typeface="Calibri"/>
+              <a:spcAft>
+                <a:spcPts val="1000"/>
+              </a:spcAft>
+              <a:buSzPct val="100000"/>
               <a:buChar char="•"/>
               <a:lnSpc>
                 <a:spcPts val="2200"/>
@@ -10773,10 +10783,12 @@
             </a:r>
           </a:p>
           <a:p>
-            <a:pPr>
-              <a:spcAft>
-                <a:spcPts val="1000"/>
-              </a:spcAft>
+            <a:pPr lvl="0" marL="457200" indent="-228600">
+              <a:buFont typeface="Calibri"/>
+              <a:spcAft>
+                <a:spcPts val="1000"/>
+              </a:spcAft>
+              <a:buSzPct val="100000"/>
               <a:buChar char="•"/>
               <a:lnSpc>
                 <a:spcPts val="2200"/>
@@ -10912,10 +10924,12 @@
           </a:bodyPr>
           <a:lstStyle/>
           <a:p>
-            <a:pPr>
-              <a:spcAft>
-                <a:spcPts val="1000"/>
-              </a:spcAft>
+            <a:pPr lvl="0" marL="457200" indent="-228600">
+              <a:buFont typeface="Calibri"/>
+              <a:spcAft>
+                <a:spcPts val="1000"/>
+              </a:spcAft>
+              <a:buSzPct val="100000"/>
               <a:buChar char="•"/>
               <a:lnSpc>
                 <a:spcPts val="2200"/>
@@ -10932,10 +10946,12 @@
             </a:r>
           </a:p>
           <a:p>
-            <a:pPr>
-              <a:spcAft>
-                <a:spcPts val="1000"/>
-              </a:spcAft>
+            <a:pPr lvl="0" marL="457200" indent="-228600">
+              <a:buFont typeface="Calibri"/>
+              <a:spcAft>
+                <a:spcPts val="1000"/>
+              </a:spcAft>
+              <a:buSzPct val="100000"/>
               <a:buChar char="•"/>
               <a:lnSpc>
                 <a:spcPts val="2200"/>
@@ -10952,10 +10968,12 @@
             </a:r>
           </a:p>
           <a:p>
-            <a:pPr>
-              <a:spcAft>
-                <a:spcPts val="1000"/>
-              </a:spcAft>
+            <a:pPr lvl="0" marL="457200" indent="-228600">
+              <a:buFont typeface="Calibri"/>
+              <a:spcAft>
+                <a:spcPts val="1000"/>
+              </a:spcAft>
+              <a:buSzPct val="100000"/>
               <a:buChar char="•"/>
               <a:lnSpc>
                 <a:spcPts val="2200"/>
@@ -10972,10 +10990,12 @@
             </a:r>
           </a:p>
           <a:p>
-            <a:pPr>
-              <a:spcAft>
-                <a:spcPts val="1000"/>
-              </a:spcAft>
+            <a:pPr lvl="0" marL="457200" indent="-228600">
+              <a:buFont typeface="Calibri"/>
+              <a:spcAft>
+                <a:spcPts val="1000"/>
+              </a:spcAft>
+              <a:buSzPct val="100000"/>
               <a:buChar char="•"/>
               <a:lnSpc>
                 <a:spcPts val="2200"/>
@@ -10992,10 +11012,12 @@
             </a:r>
           </a:p>
           <a:p>
-            <a:pPr>
-              <a:spcAft>
-                <a:spcPts val="1000"/>
-              </a:spcAft>
+            <a:pPr lvl="0" marL="457200" indent="-228600">
+              <a:buFont typeface="Calibri"/>
+              <a:spcAft>
+                <a:spcPts val="1000"/>
+              </a:spcAft>
+              <a:buSzPct val="100000"/>
               <a:buChar char="•"/>
               <a:lnSpc>
                 <a:spcPts val="2200"/>
@@ -11012,10 +11034,12 @@
             </a:r>
           </a:p>
           <a:p>
-            <a:pPr>
-              <a:spcAft>
-                <a:spcPts val="1000"/>
-              </a:spcAft>
+            <a:pPr lvl="0" marL="457200" indent="-228600">
+              <a:buFont typeface="Calibri"/>
+              <a:spcAft>
+                <a:spcPts val="1000"/>
+              </a:spcAft>
+              <a:buSzPct val="100000"/>
               <a:buChar char="•"/>
               <a:lnSpc>
                 <a:spcPts val="2200"/>
@@ -11151,10 +11175,12 @@
           </a:bodyPr>
           <a:lstStyle/>
           <a:p>
-            <a:pPr>
-              <a:spcAft>
-                <a:spcPts val="1000"/>
-              </a:spcAft>
+            <a:pPr lvl="0" marL="457200" indent="-228600">
+              <a:buFont typeface="Calibri"/>
+              <a:spcAft>
+                <a:spcPts val="1000"/>
+              </a:spcAft>
+              <a:buSzPct val="100000"/>
               <a:buChar char="•"/>
               <a:lnSpc>
                 <a:spcPts val="2200"/>
@@ -11171,10 +11197,12 @@
             </a:r>
           </a:p>
           <a:p>
-            <a:pPr>
-              <a:spcAft>
-                <a:spcPts val="1000"/>
-              </a:spcAft>
+            <a:pPr lvl="0" marL="457200" indent="-228600">
+              <a:buFont typeface="Calibri"/>
+              <a:spcAft>
+                <a:spcPts val="1000"/>
+              </a:spcAft>
+              <a:buSzPct val="100000"/>
               <a:buChar char="•"/>
               <a:lnSpc>
                 <a:spcPts val="2200"/>
@@ -11191,10 +11219,12 @@
             </a:r>
           </a:p>
           <a:p>
-            <a:pPr>
-              <a:spcAft>
-                <a:spcPts val="1000"/>
-              </a:spcAft>
+            <a:pPr lvl="0" marL="457200" indent="-228600">
+              <a:buFont typeface="Calibri"/>
+              <a:spcAft>
+                <a:spcPts val="1000"/>
+              </a:spcAft>
+              <a:buSzPct val="100000"/>
               <a:buChar char="•"/>
               <a:lnSpc>
                 <a:spcPts val="2200"/>
@@ -11211,10 +11241,12 @@
             </a:r>
           </a:p>
           <a:p>
-            <a:pPr>
-              <a:spcAft>
-                <a:spcPts val="1000"/>
-              </a:spcAft>
+            <a:pPr lvl="0" marL="457200" indent="-228600">
+              <a:buFont typeface="Calibri"/>
+              <a:spcAft>
+                <a:spcPts val="1000"/>
+              </a:spcAft>
+              <a:buSzPct val="100000"/>
               <a:buChar char="•"/>
               <a:lnSpc>
                 <a:spcPts val="2200"/>
@@ -11231,10 +11263,12 @@
             </a:r>
           </a:p>
           <a:p>
-            <a:pPr>
-              <a:spcAft>
-                <a:spcPts val="1000"/>
-              </a:spcAft>
+            <a:pPr lvl="0" marL="457200" indent="-228600">
+              <a:buFont typeface="Calibri"/>
+              <a:spcAft>
+                <a:spcPts val="1000"/>
+              </a:spcAft>
+              <a:buSzPct val="100000"/>
               <a:buChar char="•"/>
               <a:lnSpc>
                 <a:spcPts val="2200"/>
@@ -11251,10 +11285,12 @@
             </a:r>
           </a:p>
           <a:p>
-            <a:pPr>
-              <a:spcAft>
-                <a:spcPts val="1000"/>
-              </a:spcAft>
+            <a:pPr lvl="0" marL="457200" indent="-228600">
+              <a:buFont typeface="Calibri"/>
+              <a:spcAft>
+                <a:spcPts val="1000"/>
+              </a:spcAft>
+              <a:buSzPct val="100000"/>
               <a:buChar char="•"/>
               <a:lnSpc>
                 <a:spcPts val="2200"/>
@@ -11390,10 +11426,12 @@
           </a:bodyPr>
           <a:lstStyle/>
           <a:p>
-            <a:pPr>
-              <a:spcAft>
-                <a:spcPts val="1000"/>
-              </a:spcAft>
+            <a:pPr lvl="0" marL="457200" indent="-228600">
+              <a:buFont typeface="Calibri"/>
+              <a:spcAft>
+                <a:spcPts val="1000"/>
+              </a:spcAft>
+              <a:buSzPct val="100000"/>
               <a:buChar char="•"/>
               <a:lnSpc>
                 <a:spcPts val="2200"/>
@@ -11410,10 +11448,12 @@
             </a:r>
           </a:p>
           <a:p>
-            <a:pPr>
-              <a:spcAft>
-                <a:spcPts val="1000"/>
-              </a:spcAft>
+            <a:pPr lvl="0" marL="457200" indent="-228600">
+              <a:buFont typeface="Calibri"/>
+              <a:spcAft>
+                <a:spcPts val="1000"/>
+              </a:spcAft>
+              <a:buSzPct val="100000"/>
               <a:buChar char="•"/>
               <a:lnSpc>
                 <a:spcPts val="2200"/>
@@ -11430,10 +11470,12 @@
             </a:r>
           </a:p>
           <a:p>
-            <a:pPr>
-              <a:spcAft>
-                <a:spcPts val="1000"/>
-              </a:spcAft>
+            <a:pPr lvl="0" marL="457200" indent="-228600">
+              <a:buFont typeface="Calibri"/>
+              <a:spcAft>
+                <a:spcPts val="1000"/>
+              </a:spcAft>
+              <a:buSzPct val="100000"/>
               <a:buChar char="•"/>
               <a:lnSpc>
                 <a:spcPts val="2200"/>
@@ -11450,10 +11492,12 @@
             </a:r>
           </a:p>
           <a:p>
-            <a:pPr>
-              <a:spcAft>
-                <a:spcPts val="1000"/>
-              </a:spcAft>
+            <a:pPr lvl="0" marL="457200" indent="-228600">
+              <a:buFont typeface="Calibri"/>
+              <a:spcAft>
+                <a:spcPts val="1000"/>
+              </a:spcAft>
+              <a:buSzPct val="100000"/>
               <a:buChar char="•"/>
               <a:lnSpc>
                 <a:spcPts val="2200"/>
@@ -11470,10 +11514,12 @@
             </a:r>
           </a:p>
           <a:p>
-            <a:pPr>
-              <a:spcAft>
-                <a:spcPts val="1000"/>
-              </a:spcAft>
+            <a:pPr lvl="0" marL="457200" indent="-228600">
+              <a:buFont typeface="Calibri"/>
+              <a:spcAft>
+                <a:spcPts val="1000"/>
+              </a:spcAft>
+              <a:buSzPct val="100000"/>
               <a:buChar char="•"/>
               <a:lnSpc>
                 <a:spcPts val="2200"/>
@@ -11490,10 +11536,12 @@
             </a:r>
           </a:p>
           <a:p>
-            <a:pPr>
-              <a:spcAft>
-                <a:spcPts val="1000"/>
-              </a:spcAft>
+            <a:pPr lvl="0" marL="457200" indent="-228600">
+              <a:buFont typeface="Calibri"/>
+              <a:spcAft>
+                <a:spcPts val="1000"/>
+              </a:spcAft>
+              <a:buSzPct val="100000"/>
               <a:buChar char="•"/>
               <a:lnSpc>
                 <a:spcPts val="2200"/>
@@ -11629,10 +11677,12 @@
           </a:bodyPr>
           <a:lstStyle/>
           <a:p>
-            <a:pPr>
-              <a:spcAft>
-                <a:spcPts val="1000"/>
-              </a:spcAft>
+            <a:pPr lvl="0" marL="457200" indent="-228600">
+              <a:buFont typeface="Calibri"/>
+              <a:spcAft>
+                <a:spcPts val="1000"/>
+              </a:spcAft>
+              <a:buSzPct val="100000"/>
               <a:buChar char="•"/>
               <a:lnSpc>
                 <a:spcPts val="2200"/>
@@ -11649,10 +11699,12 @@
             </a:r>
           </a:p>
           <a:p>
-            <a:pPr>
-              <a:spcAft>
-                <a:spcPts val="1000"/>
-              </a:spcAft>
+            <a:pPr lvl="0" marL="457200" indent="-228600">
+              <a:buFont typeface="Calibri"/>
+              <a:spcAft>
+                <a:spcPts val="1000"/>
+              </a:spcAft>
+              <a:buSzPct val="100000"/>
               <a:buChar char="•"/>
               <a:lnSpc>
                 <a:spcPts val="2200"/>
@@ -11669,10 +11721,12 @@
             </a:r>
           </a:p>
           <a:p>
-            <a:pPr>
-              <a:spcAft>
-                <a:spcPts val="1000"/>
-              </a:spcAft>
+            <a:pPr lvl="0" marL="457200" indent="-228600">
+              <a:buFont typeface="Calibri"/>
+              <a:spcAft>
+                <a:spcPts val="1000"/>
+              </a:spcAft>
+              <a:buSzPct val="100000"/>
               <a:buChar char="•"/>
               <a:lnSpc>
                 <a:spcPts val="2200"/>
@@ -11689,10 +11743,12 @@
             </a:r>
           </a:p>
           <a:p>
-            <a:pPr>
-              <a:spcAft>
-                <a:spcPts val="1000"/>
-              </a:spcAft>
+            <a:pPr lvl="0" marL="457200" indent="-228600">
+              <a:buFont typeface="Calibri"/>
+              <a:spcAft>
+                <a:spcPts val="1000"/>
+              </a:spcAft>
+              <a:buSzPct val="100000"/>
               <a:buChar char="•"/>
               <a:lnSpc>
                 <a:spcPts val="2200"/>
@@ -11709,10 +11765,12 @@
             </a:r>
           </a:p>
           <a:p>
-            <a:pPr>
-              <a:spcAft>
-                <a:spcPts val="1000"/>
-              </a:spcAft>
+            <a:pPr lvl="0" marL="457200" indent="-228600">
+              <a:buFont typeface="Calibri"/>
+              <a:spcAft>
+                <a:spcPts val="1000"/>
+              </a:spcAft>
+              <a:buSzPct val="100000"/>
               <a:buChar char="•"/>
               <a:lnSpc>
                 <a:spcPts val="2200"/>
@@ -12311,10 +12369,12 @@
           </a:bodyPr>
           <a:lstStyle/>
           <a:p>
-            <a:pPr>
-              <a:spcAft>
-                <a:spcPts val="1000"/>
-              </a:spcAft>
+            <a:pPr lvl="0" marL="457200" indent="-228600">
+              <a:buFont typeface="Calibri"/>
+              <a:spcAft>
+                <a:spcPts val="1000"/>
+              </a:spcAft>
+              <a:buSzPct val="100000"/>
               <a:buChar char="•"/>
               <a:lnSpc>
                 <a:spcPts val="2200"/>
@@ -12331,10 +12391,12 @@
             </a:r>
           </a:p>
           <a:p>
-            <a:pPr>
-              <a:spcAft>
-                <a:spcPts val="1000"/>
-              </a:spcAft>
+            <a:pPr lvl="0" marL="457200" indent="-228600">
+              <a:buFont typeface="Calibri"/>
+              <a:spcAft>
+                <a:spcPts val="1000"/>
+              </a:spcAft>
+              <a:buSzPct val="100000"/>
               <a:buChar char="•"/>
               <a:lnSpc>
                 <a:spcPts val="2200"/>
@@ -12351,10 +12413,12 @@
             </a:r>
           </a:p>
           <a:p>
-            <a:pPr>
-              <a:spcAft>
-                <a:spcPts val="1000"/>
-              </a:spcAft>
+            <a:pPr lvl="0" marL="457200" indent="-228600">
+              <a:buFont typeface="Calibri"/>
+              <a:spcAft>
+                <a:spcPts val="1000"/>
+              </a:spcAft>
+              <a:buSzPct val="100000"/>
               <a:buChar char="•"/>
               <a:lnSpc>
                 <a:spcPts val="2200"/>
@@ -12490,10 +12554,12 @@
           </a:bodyPr>
           <a:lstStyle/>
           <a:p>
-            <a:pPr>
-              <a:spcAft>
-                <a:spcPts val="1000"/>
-              </a:spcAft>
+            <a:pPr lvl="0" marL="457200" indent="-228600">
+              <a:buFont typeface="Calibri"/>
+              <a:spcAft>
+                <a:spcPts val="1000"/>
+              </a:spcAft>
+              <a:buSzPct val="100000"/>
               <a:buChar char="•"/>
               <a:lnSpc>
                 <a:spcPts val="2200"/>
@@ -12510,10 +12576,12 @@
             </a:r>
           </a:p>
           <a:p>
-            <a:pPr>
-              <a:spcAft>
-                <a:spcPts val="1000"/>
-              </a:spcAft>
+            <a:pPr lvl="0" marL="457200" indent="-228600">
+              <a:buFont typeface="Calibri"/>
+              <a:spcAft>
+                <a:spcPts val="1000"/>
+              </a:spcAft>
+              <a:buSzPct val="100000"/>
               <a:buChar char="•"/>
               <a:lnSpc>
                 <a:spcPts val="2200"/>
@@ -12530,10 +12598,12 @@
             </a:r>
           </a:p>
           <a:p>
-            <a:pPr>
-              <a:spcAft>
-                <a:spcPts val="1000"/>
-              </a:spcAft>
+            <a:pPr lvl="0" marL="457200" indent="-228600">
+              <a:buFont typeface="Calibri"/>
+              <a:spcAft>
+                <a:spcPts val="1000"/>
+              </a:spcAft>
+              <a:buSzPct val="100000"/>
               <a:buChar char="•"/>
               <a:lnSpc>
                 <a:spcPts val="2200"/>
@@ -12669,10 +12739,12 @@
           </a:bodyPr>
           <a:lstStyle/>
           <a:p>
-            <a:pPr>
-              <a:spcAft>
-                <a:spcPts val="1000"/>
-              </a:spcAft>
+            <a:pPr lvl="0" marL="457200" indent="-228600">
+              <a:buFont typeface="Calibri"/>
+              <a:spcAft>
+                <a:spcPts val="1000"/>
+              </a:spcAft>
+              <a:buSzPct val="100000"/>
               <a:buChar char="•"/>
               <a:lnSpc>
                 <a:spcPts val="2200"/>
@@ -12808,10 +12880,12 @@
           </a:bodyPr>
           <a:lstStyle/>
           <a:p>
-            <a:pPr>
-              <a:spcAft>
-                <a:spcPts val="1000"/>
-              </a:spcAft>
+            <a:pPr lvl="0" marL="457200" indent="-228600">
+              <a:buFont typeface="Calibri"/>
+              <a:spcAft>
+                <a:spcPts val="1000"/>
+              </a:spcAft>
+              <a:buSzPct val="100000"/>
               <a:buChar char="•"/>
               <a:lnSpc>
                 <a:spcPts val="2200"/>
@@ -12828,10 +12902,12 @@
             </a:r>
           </a:p>
           <a:p>
-            <a:pPr>
-              <a:spcAft>
-                <a:spcPts val="1000"/>
-              </a:spcAft>
+            <a:pPr lvl="0" marL="457200" indent="-228600">
+              <a:buFont typeface="Calibri"/>
+              <a:spcAft>
+                <a:spcPts val="1000"/>
+              </a:spcAft>
+              <a:buSzPct val="100000"/>
               <a:buChar char="•"/>
               <a:lnSpc>
                 <a:spcPts val="2200"/>
@@ -12848,10 +12924,12 @@
             </a:r>
           </a:p>
           <a:p>
-            <a:pPr>
-              <a:spcAft>
-                <a:spcPts val="1000"/>
-              </a:spcAft>
+            <a:pPr lvl="0" marL="457200" indent="-228600">
+              <a:buFont typeface="Calibri"/>
+              <a:spcAft>
+                <a:spcPts val="1000"/>
+              </a:spcAft>
+              <a:buSzPct val="100000"/>
               <a:buChar char="•"/>
               <a:lnSpc>
                 <a:spcPts val="2200"/>
@@ -12987,10 +13065,12 @@
           </a:bodyPr>
           <a:lstStyle/>
           <a:p>
-            <a:pPr>
-              <a:spcAft>
-                <a:spcPts val="1000"/>
-              </a:spcAft>
+            <a:pPr lvl="0" marL="457200" indent="-228600">
+              <a:buFont typeface="Calibri"/>
+              <a:spcAft>
+                <a:spcPts val="1000"/>
+              </a:spcAft>
+              <a:buSzPct val="100000"/>
               <a:buChar char="•"/>
               <a:lnSpc>
                 <a:spcPts val="2200"/>
@@ -13007,10 +13087,12 @@
             </a:r>
           </a:p>
           <a:p>
-            <a:pPr>
-              <a:spcAft>
-                <a:spcPts val="1000"/>
-              </a:spcAft>
+            <a:pPr lvl="0" marL="457200" indent="-228600">
+              <a:buFont typeface="Calibri"/>
+              <a:spcAft>
+                <a:spcPts val="1000"/>
+              </a:spcAft>
+              <a:buSzPct val="100000"/>
               <a:buChar char="•"/>
               <a:lnSpc>
                 <a:spcPts val="2200"/>
@@ -13146,10 +13228,12 @@
           </a:bodyPr>
           <a:lstStyle/>
           <a:p>
-            <a:pPr>
-              <a:spcAft>
-                <a:spcPts val="1000"/>
-              </a:spcAft>
+            <a:pPr lvl="0" marL="457200" indent="-228600">
+              <a:buFont typeface="Calibri"/>
+              <a:spcAft>
+                <a:spcPts val="1000"/>
+              </a:spcAft>
+              <a:buSzPct val="100000"/>
               <a:buChar char="•"/>
               <a:lnSpc>
                 <a:spcPts val="2200"/>
@@ -13285,10 +13369,12 @@
           </a:bodyPr>
           <a:lstStyle/>
           <a:p>
-            <a:pPr>
-              <a:spcAft>
-                <a:spcPts val="1000"/>
-              </a:spcAft>
+            <a:pPr lvl="0" marL="457200" indent="-228600">
+              <a:buFont typeface="Calibri"/>
+              <a:spcAft>
+                <a:spcPts val="1000"/>
+              </a:spcAft>
+              <a:buSzPct val="100000"/>
               <a:buChar char="•"/>
               <a:lnSpc>
                 <a:spcPts val="2200"/>
@@ -13305,10 +13391,12 @@
             </a:r>
           </a:p>
           <a:p>
-            <a:pPr>
-              <a:spcAft>
-                <a:spcPts val="1000"/>
-              </a:spcAft>
+            <a:pPr lvl="0" marL="457200" indent="-228600">
+              <a:buFont typeface="Calibri"/>
+              <a:spcAft>
+                <a:spcPts val="1000"/>
+              </a:spcAft>
+              <a:buSzPct val="100000"/>
               <a:buChar char="•"/>
               <a:lnSpc>
                 <a:spcPts val="2200"/>
@@ -13325,10 +13413,12 @@
             </a:r>
           </a:p>
           <a:p>
-            <a:pPr>
-              <a:spcAft>
-                <a:spcPts val="1000"/>
-              </a:spcAft>
+            <a:pPr lvl="0" marL="457200" indent="-228600">
+              <a:buFont typeface="Calibri"/>
+              <a:spcAft>
+                <a:spcPts val="1000"/>
+              </a:spcAft>
+              <a:buSzPct val="100000"/>
               <a:buChar char="•"/>
               <a:lnSpc>
                 <a:spcPts val="2200"/>
@@ -13345,10 +13435,12 @@
             </a:r>
           </a:p>
           <a:p>
-            <a:pPr>
-              <a:spcAft>
-                <a:spcPts val="1000"/>
-              </a:spcAft>
+            <a:pPr lvl="0" marL="457200" indent="-228600">
+              <a:buFont typeface="Calibri"/>
+              <a:spcAft>
+                <a:spcPts val="1000"/>
+              </a:spcAft>
+              <a:buSzPct val="100000"/>
               <a:buChar char="•"/>
               <a:lnSpc>
                 <a:spcPts val="2200"/>
@@ -13365,10 +13457,12 @@
             </a:r>
           </a:p>
           <a:p>
-            <a:pPr>
-              <a:spcAft>
-                <a:spcPts val="1000"/>
-              </a:spcAft>
+            <a:pPr lvl="0" marL="457200" indent="-228600">
+              <a:buFont typeface="Calibri"/>
+              <a:spcAft>
+                <a:spcPts val="1000"/>
+              </a:spcAft>
+              <a:buSzPct val="100000"/>
               <a:buChar char="•"/>
               <a:lnSpc>
                 <a:spcPts val="2200"/>
@@ -13967,10 +14061,12 @@
           </a:bodyPr>
           <a:lstStyle/>
           <a:p>
-            <a:pPr>
-              <a:spcAft>
-                <a:spcPts val="1000"/>
-              </a:spcAft>
+            <a:pPr lvl="0" marL="457200" indent="-228600">
+              <a:buFont typeface="Calibri"/>
+              <a:spcAft>
+                <a:spcPts val="1000"/>
+              </a:spcAft>
+              <a:buSzPct val="100000"/>
               <a:buChar char="•"/>
               <a:lnSpc>
                 <a:spcPts val="2200"/>
@@ -13987,10 +14083,12 @@
             </a:r>
           </a:p>
           <a:p>
-            <a:pPr>
-              <a:spcAft>
-                <a:spcPts val="1000"/>
-              </a:spcAft>
+            <a:pPr lvl="0" marL="457200" indent="-228600">
+              <a:buFont typeface="Calibri"/>
+              <a:spcAft>
+                <a:spcPts val="1000"/>
+              </a:spcAft>
+              <a:buSzPct val="100000"/>
               <a:buChar char="•"/>
               <a:lnSpc>
                 <a:spcPts val="2200"/>
@@ -14007,10 +14105,12 @@
             </a:r>
           </a:p>
           <a:p>
-            <a:pPr>
-              <a:spcAft>
-                <a:spcPts val="1000"/>
-              </a:spcAft>
+            <a:pPr lvl="0" marL="457200" indent="-228600">
+              <a:buFont typeface="Calibri"/>
+              <a:spcAft>
+                <a:spcPts val="1000"/>
+              </a:spcAft>
+              <a:buSzPct val="100000"/>
               <a:buChar char="•"/>
               <a:lnSpc>
                 <a:spcPts val="2200"/>
@@ -14027,10 +14127,12 @@
             </a:r>
           </a:p>
           <a:p>
-            <a:pPr>
-              <a:spcAft>
-                <a:spcPts val="1000"/>
-              </a:spcAft>
+            <a:pPr lvl="0" marL="457200" indent="-228600">
+              <a:buFont typeface="Calibri"/>
+              <a:spcAft>
+                <a:spcPts val="1000"/>
+              </a:spcAft>
+              <a:buSzPct val="100000"/>
               <a:buChar char="•"/>
               <a:lnSpc>
                 <a:spcPts val="2200"/>
@@ -14047,10 +14149,12 @@
             </a:r>
           </a:p>
           <a:p>
-            <a:pPr>
-              <a:spcAft>
-                <a:spcPts val="1000"/>
-              </a:spcAft>
+            <a:pPr lvl="0" marL="457200" indent="-228600">
+              <a:buFont typeface="Calibri"/>
+              <a:spcAft>
+                <a:spcPts val="1000"/>
+              </a:spcAft>
+              <a:buSzPct val="100000"/>
               <a:buChar char="•"/>
               <a:lnSpc>
                 <a:spcPts val="2200"/>
@@ -14186,10 +14290,12 @@
           </a:bodyPr>
           <a:lstStyle/>
           <a:p>
-            <a:pPr>
-              <a:spcAft>
-                <a:spcPts val="1000"/>
-              </a:spcAft>
+            <a:pPr lvl="0" marL="457200" indent="-228600">
+              <a:buFont typeface="Calibri"/>
+              <a:spcAft>
+                <a:spcPts val="1000"/>
+              </a:spcAft>
+              <a:buSzPct val="100000"/>
               <a:buChar char="•"/>
               <a:lnSpc>
                 <a:spcPts val="2200"/>
@@ -14206,10 +14312,12 @@
             </a:r>
           </a:p>
           <a:p>
-            <a:pPr>
-              <a:spcAft>
-                <a:spcPts val="1000"/>
-              </a:spcAft>
+            <a:pPr lvl="0" marL="457200" indent="-228600">
+              <a:buFont typeface="Calibri"/>
+              <a:spcAft>
+                <a:spcPts val="1000"/>
+              </a:spcAft>
+              <a:buSzPct val="100000"/>
               <a:buChar char="•"/>
               <a:lnSpc>
                 <a:spcPts val="2200"/>
@@ -14226,10 +14334,12 @@
             </a:r>
           </a:p>
           <a:p>
-            <a:pPr>
-              <a:spcAft>
-                <a:spcPts val="1000"/>
-              </a:spcAft>
+            <a:pPr lvl="0" marL="457200" indent="-228600">
+              <a:buFont typeface="Calibri"/>
+              <a:spcAft>
+                <a:spcPts val="1000"/>
+              </a:spcAft>
+              <a:buSzPct val="100000"/>
               <a:buChar char="•"/>
               <a:lnSpc>
                 <a:spcPts val="2200"/>
@@ -14246,10 +14356,12 @@
             </a:r>
           </a:p>
           <a:p>
-            <a:pPr>
-              <a:spcAft>
-                <a:spcPts val="1000"/>
-              </a:spcAft>
+            <a:pPr lvl="0" marL="457200" indent="-228600">
+              <a:buFont typeface="Calibri"/>
+              <a:spcAft>
+                <a:spcPts val="1000"/>
+              </a:spcAft>
+              <a:buSzPct val="100000"/>
               <a:buChar char="•"/>
               <a:lnSpc>
                 <a:spcPts val="2200"/>
@@ -14385,10 +14497,12 @@
           </a:bodyPr>
           <a:lstStyle/>
           <a:p>
-            <a:pPr>
-              <a:spcAft>
-                <a:spcPts val="1000"/>
-              </a:spcAft>
+            <a:pPr lvl="0" marL="457200" indent="-228600">
+              <a:buFont typeface="Calibri"/>
+              <a:spcAft>
+                <a:spcPts val="1000"/>
+              </a:spcAft>
+              <a:buSzPct val="100000"/>
               <a:buChar char="•"/>
               <a:lnSpc>
                 <a:spcPts val="2200"/>
@@ -14405,10 +14519,12 @@
             </a:r>
           </a:p>
           <a:p>
-            <a:pPr>
-              <a:spcAft>
-                <a:spcPts val="1000"/>
-              </a:spcAft>
+            <a:pPr lvl="0" marL="457200" indent="-228600">
+              <a:buFont typeface="Calibri"/>
+              <a:spcAft>
+                <a:spcPts val="1000"/>
+              </a:spcAft>
+              <a:buSzPct val="100000"/>
               <a:buChar char="•"/>
               <a:lnSpc>
                 <a:spcPts val="2200"/>
@@ -14425,10 +14541,12 @@
             </a:r>
           </a:p>
           <a:p>
-            <a:pPr>
-              <a:spcAft>
-                <a:spcPts val="1000"/>
-              </a:spcAft>
+            <a:pPr lvl="0" marL="457200" indent="-228600">
+              <a:buFont typeface="Calibri"/>
+              <a:spcAft>
+                <a:spcPts val="1000"/>
+              </a:spcAft>
+              <a:buSzPct val="100000"/>
               <a:buChar char="•"/>
               <a:lnSpc>
                 <a:spcPts val="2200"/>
@@ -14445,10 +14563,12 @@
             </a:r>
           </a:p>
           <a:p>
-            <a:pPr>
-              <a:spcAft>
-                <a:spcPts val="1000"/>
-              </a:spcAft>
+            <a:pPr lvl="0" marL="457200" indent="-228600">
+              <a:buFont typeface="Calibri"/>
+              <a:spcAft>
+                <a:spcPts val="1000"/>
+              </a:spcAft>
+              <a:buSzPct val="100000"/>
               <a:buChar char="•"/>
               <a:lnSpc>
                 <a:spcPts val="2200"/>
@@ -14465,10 +14585,12 @@
             </a:r>
           </a:p>
           <a:p>
-            <a:pPr>
-              <a:spcAft>
-                <a:spcPts val="1000"/>
-              </a:spcAft>
+            <a:pPr lvl="0" marL="457200" indent="-228600">
+              <a:buFont typeface="Calibri"/>
+              <a:spcAft>
+                <a:spcPts val="1000"/>
+              </a:spcAft>
+              <a:buSzPct val="100000"/>
               <a:buChar char="•"/>
               <a:lnSpc>
                 <a:spcPts val="2200"/>
@@ -14604,10 +14726,12 @@
           </a:bodyPr>
           <a:lstStyle/>
           <a:p>
-            <a:pPr>
-              <a:spcAft>
-                <a:spcPts val="1000"/>
-              </a:spcAft>
+            <a:pPr lvl="0" marL="457200" indent="-228600">
+              <a:buFont typeface="Calibri"/>
+              <a:spcAft>
+                <a:spcPts val="1000"/>
+              </a:spcAft>
+              <a:buSzPct val="100000"/>
               <a:buChar char="•"/>
               <a:lnSpc>
                 <a:spcPts val="2200"/>
@@ -14624,10 +14748,12 @@
             </a:r>
           </a:p>
           <a:p>
-            <a:pPr>
-              <a:spcAft>
-                <a:spcPts val="1000"/>
-              </a:spcAft>
+            <a:pPr lvl="0" marL="457200" indent="-228600">
+              <a:buFont typeface="Calibri"/>
+              <a:spcAft>
+                <a:spcPts val="1000"/>
+              </a:spcAft>
+              <a:buSzPct val="100000"/>
               <a:buChar char="•"/>
               <a:lnSpc>
                 <a:spcPts val="2200"/>
@@ -14644,10 +14770,12 @@
             </a:r>
           </a:p>
           <a:p>
-            <a:pPr>
-              <a:spcAft>
-                <a:spcPts val="1000"/>
-              </a:spcAft>
+            <a:pPr lvl="0" marL="457200" indent="-228600">
+              <a:buFont typeface="Calibri"/>
+              <a:spcAft>
+                <a:spcPts val="1000"/>
+              </a:spcAft>
+              <a:buSzPct val="100000"/>
               <a:buChar char="•"/>
               <a:lnSpc>
                 <a:spcPts val="2200"/>
@@ -14783,10 +14911,12 @@
           </a:bodyPr>
           <a:lstStyle/>
           <a:p>
-            <a:pPr>
-              <a:spcAft>
-                <a:spcPts val="1000"/>
-              </a:spcAft>
+            <a:pPr lvl="0" marL="457200" indent="-228600">
+              <a:buFont typeface="Calibri"/>
+              <a:spcAft>
+                <a:spcPts val="1000"/>
+              </a:spcAft>
+              <a:buSzPct val="100000"/>
               <a:buChar char="•"/>
               <a:lnSpc>
                 <a:spcPts val="2200"/>
@@ -14803,10 +14933,12 @@
             </a:r>
           </a:p>
           <a:p>
-            <a:pPr>
-              <a:spcAft>
-                <a:spcPts val="1000"/>
-              </a:spcAft>
+            <a:pPr lvl="0" marL="457200" indent="-228600">
+              <a:buFont typeface="Calibri"/>
+              <a:spcAft>
+                <a:spcPts val="1000"/>
+              </a:spcAft>
+              <a:buSzPct val="100000"/>
               <a:buChar char="•"/>
               <a:lnSpc>
                 <a:spcPts val="2200"/>
@@ -14823,10 +14955,12 @@
             </a:r>
           </a:p>
           <a:p>
-            <a:pPr>
-              <a:spcAft>
-                <a:spcPts val="1000"/>
-              </a:spcAft>
+            <a:pPr lvl="0" marL="457200" indent="-228600">
+              <a:buFont typeface="Calibri"/>
+              <a:spcAft>
+                <a:spcPts val="1000"/>
+              </a:spcAft>
+              <a:buSzPct val="100000"/>
               <a:buChar char="•"/>
               <a:lnSpc>
                 <a:spcPts val="2200"/>
@@ -14843,10 +14977,12 @@
             </a:r>
           </a:p>
           <a:p>
-            <a:pPr>
-              <a:spcAft>
-                <a:spcPts val="1000"/>
-              </a:spcAft>
+            <a:pPr lvl="0" marL="457200" indent="-228600">
+              <a:buFont typeface="Calibri"/>
+              <a:spcAft>
+                <a:spcPts val="1000"/>
+              </a:spcAft>
+              <a:buSzPct val="100000"/>
               <a:buChar char="•"/>
               <a:lnSpc>
                 <a:spcPts val="2200"/>
@@ -14863,10 +14999,12 @@
             </a:r>
           </a:p>
           <a:p>
-            <a:pPr>
-              <a:spcAft>
-                <a:spcPts val="1000"/>
-              </a:spcAft>
+            <a:pPr lvl="0" marL="457200" indent="-228600">
+              <a:buFont typeface="Calibri"/>
+              <a:spcAft>
+                <a:spcPts val="1000"/>
+              </a:spcAft>
+              <a:buSzPct val="100000"/>
               <a:buChar char="•"/>
               <a:lnSpc>
                 <a:spcPts val="2200"/>
@@ -15002,10 +15140,12 @@
           </a:bodyPr>
           <a:lstStyle/>
           <a:p>
-            <a:pPr>
-              <a:spcAft>
-                <a:spcPts val="1000"/>
-              </a:spcAft>
+            <a:pPr lvl="0" marL="457200" indent="-228600">
+              <a:buFont typeface="Calibri"/>
+              <a:spcAft>
+                <a:spcPts val="1000"/>
+              </a:spcAft>
+              <a:buSzPct val="100000"/>
               <a:buChar char="•"/>
               <a:lnSpc>
                 <a:spcPts val="2200"/>
@@ -15022,10 +15162,12 @@
             </a:r>
           </a:p>
           <a:p>
-            <a:pPr>
-              <a:spcAft>
-                <a:spcPts val="1000"/>
-              </a:spcAft>
+            <a:pPr lvl="0" marL="457200" indent="-228600">
+              <a:buFont typeface="Calibri"/>
+              <a:spcAft>
+                <a:spcPts val="1000"/>
+              </a:spcAft>
+              <a:buSzPct val="100000"/>
               <a:buChar char="•"/>
               <a:lnSpc>
                 <a:spcPts val="2200"/>
@@ -15042,10 +15184,12 @@
             </a:r>
           </a:p>
           <a:p>
-            <a:pPr>
-              <a:spcAft>
-                <a:spcPts val="1000"/>
-              </a:spcAft>
+            <a:pPr lvl="0" marL="457200" indent="-228600">
+              <a:buFont typeface="Calibri"/>
+              <a:spcAft>
+                <a:spcPts val="1000"/>
+              </a:spcAft>
+              <a:buSzPct val="100000"/>
               <a:buChar char="•"/>
               <a:lnSpc>
                 <a:spcPts val="2200"/>
@@ -15181,10 +15325,12 @@
           </a:bodyPr>
           <a:lstStyle/>
           <a:p>
-            <a:pPr>
-              <a:spcAft>
-                <a:spcPts val="1000"/>
-              </a:spcAft>
+            <a:pPr lvl="0" marL="457200" indent="-228600">
+              <a:buFont typeface="Calibri"/>
+              <a:spcAft>
+                <a:spcPts val="1000"/>
+              </a:spcAft>
+              <a:buSzPct val="100000"/>
               <a:buChar char="•"/>
               <a:lnSpc>
                 <a:spcPts val="2200"/>
@@ -15201,10 +15347,12 @@
             </a:r>
           </a:p>
           <a:p>
-            <a:pPr>
-              <a:spcAft>
-                <a:spcPts val="1000"/>
-              </a:spcAft>
+            <a:pPr lvl="0" marL="457200" indent="-228600">
+              <a:buFont typeface="Calibri"/>
+              <a:spcAft>
+                <a:spcPts val="1000"/>
+              </a:spcAft>
+              <a:buSzPct val="100000"/>
               <a:buChar char="•"/>
               <a:lnSpc>
                 <a:spcPts val="2200"/>
@@ -15221,10 +15369,12 @@
             </a:r>
           </a:p>
           <a:p>
-            <a:pPr>
-              <a:spcAft>
-                <a:spcPts val="1000"/>
-              </a:spcAft>
+            <a:pPr lvl="0" marL="457200" indent="-228600">
+              <a:buFont typeface="Calibri"/>
+              <a:spcAft>
+                <a:spcPts val="1000"/>
+              </a:spcAft>
+              <a:buSzPct val="100000"/>
               <a:buChar char="•"/>
               <a:lnSpc>
                 <a:spcPts val="2200"/>
@@ -15360,10 +15510,12 @@
           </a:bodyPr>
           <a:lstStyle/>
           <a:p>
-            <a:pPr>
-              <a:spcAft>
-                <a:spcPts val="1000"/>
-              </a:spcAft>
+            <a:pPr lvl="0" marL="457200" indent="-228600">
+              <a:buFont typeface="Calibri"/>
+              <a:spcAft>
+                <a:spcPts val="1000"/>
+              </a:spcAft>
+              <a:buSzPct val="100000"/>
               <a:buChar char="•"/>
               <a:lnSpc>
                 <a:spcPts val="2200"/>
@@ -15380,10 +15532,12 @@
             </a:r>
           </a:p>
           <a:p>
-            <a:pPr>
-              <a:spcAft>
-                <a:spcPts val="1000"/>
-              </a:spcAft>
+            <a:pPr lvl="0" marL="457200" indent="-228600">
+              <a:buFont typeface="Calibri"/>
+              <a:spcAft>
+                <a:spcPts val="1000"/>
+              </a:spcAft>
+              <a:buSzPct val="100000"/>
               <a:buChar char="•"/>
               <a:lnSpc>
                 <a:spcPts val="2200"/>
@@ -15400,10 +15554,12 @@
             </a:r>
           </a:p>
           <a:p>
-            <a:pPr>
-              <a:spcAft>
-                <a:spcPts val="1000"/>
-              </a:spcAft>
+            <a:pPr lvl="0" marL="457200" indent="-228600">
+              <a:buFont typeface="Calibri"/>
+              <a:spcAft>
+                <a:spcPts val="1000"/>
+              </a:spcAft>
+              <a:buSzPct val="100000"/>
               <a:buChar char="•"/>
               <a:lnSpc>
                 <a:spcPts val="2200"/>
@@ -15420,10 +15576,12 @@
             </a:r>
           </a:p>
           <a:p>
-            <a:pPr>
-              <a:spcAft>
-                <a:spcPts val="1000"/>
-              </a:spcAft>
+            <a:pPr lvl="0" marL="457200" indent="-228600">
+              <a:buFont typeface="Calibri"/>
+              <a:spcAft>
+                <a:spcPts val="1000"/>
+              </a:spcAft>
+              <a:buSzPct val="100000"/>
               <a:buChar char="•"/>
               <a:lnSpc>
                 <a:spcPts val="2200"/>
@@ -15559,10 +15717,12 @@
           </a:bodyPr>
           <a:lstStyle/>
           <a:p>
-            <a:pPr>
-              <a:spcAft>
-                <a:spcPts val="1000"/>
-              </a:spcAft>
+            <a:pPr lvl="0" marL="457200" indent="-228600">
+              <a:buFont typeface="Calibri"/>
+              <a:spcAft>
+                <a:spcPts val="1000"/>
+              </a:spcAft>
+              <a:buSzPct val="100000"/>
               <a:buChar char="•"/>
               <a:lnSpc>
                 <a:spcPts val="2200"/>
@@ -15579,10 +15739,12 @@
             </a:r>
           </a:p>
           <a:p>
-            <a:pPr>
-              <a:spcAft>
-                <a:spcPts val="1000"/>
-              </a:spcAft>
+            <a:pPr lvl="0" marL="457200" indent="-228600">
+              <a:buFont typeface="Calibri"/>
+              <a:spcAft>
+                <a:spcPts val="1000"/>
+              </a:spcAft>
+              <a:buSzPct val="100000"/>
               <a:buChar char="•"/>
               <a:lnSpc>
                 <a:spcPts val="2200"/>
@@ -15718,10 +15880,12 @@
           </a:bodyPr>
           <a:lstStyle/>
           <a:p>
-            <a:pPr>
-              <a:spcAft>
-                <a:spcPts val="1000"/>
-              </a:spcAft>
+            <a:pPr lvl="0" marL="457200" indent="-228600">
+              <a:buFont typeface="Calibri"/>
+              <a:spcAft>
+                <a:spcPts val="1000"/>
+              </a:spcAft>
+              <a:buSzPct val="100000"/>
               <a:buChar char="•"/>
               <a:lnSpc>
                 <a:spcPts val="2200"/>
@@ -15857,10 +16021,12 @@
           </a:bodyPr>
           <a:lstStyle/>
           <a:p>
-            <a:pPr>
-              <a:spcAft>
-                <a:spcPts val="1000"/>
-              </a:spcAft>
+            <a:pPr lvl="0" marL="457200" indent="-228600">
+              <a:buFont typeface="Calibri"/>
+              <a:spcAft>
+                <a:spcPts val="1000"/>
+              </a:spcAft>
+              <a:buSzPct val="100000"/>
               <a:buChar char="•"/>
               <a:lnSpc>
                 <a:spcPts val="2200"/>
@@ -15877,10 +16043,12 @@
             </a:r>
           </a:p>
           <a:p>
-            <a:pPr>
-              <a:spcAft>
-                <a:spcPts val="1000"/>
-              </a:spcAft>
+            <a:pPr lvl="0" marL="457200" indent="-228600">
+              <a:buFont typeface="Calibri"/>
+              <a:spcAft>
+                <a:spcPts val="1000"/>
+              </a:spcAft>
+              <a:buSzPct val="100000"/>
               <a:buChar char="•"/>
               <a:lnSpc>
                 <a:spcPts val="2200"/>
@@ -15897,10 +16065,12 @@
             </a:r>
           </a:p>
           <a:p>
-            <a:pPr>
-              <a:spcAft>
-                <a:spcPts val="1000"/>
-              </a:spcAft>
+            <a:pPr lvl="0" marL="457200" indent="-228600">
+              <a:buFont typeface="Calibri"/>
+              <a:spcAft>
+                <a:spcPts val="1000"/>
+              </a:spcAft>
+              <a:buSzPct val="100000"/>
               <a:buChar char="•"/>
               <a:lnSpc>
                 <a:spcPts val="2200"/>
@@ -15917,10 +16087,12 @@
             </a:r>
           </a:p>
           <a:p>
-            <a:pPr>
-              <a:spcAft>
-                <a:spcPts val="1000"/>
-              </a:spcAft>
+            <a:pPr lvl="0" marL="457200" indent="-228600">
+              <a:buFont typeface="Calibri"/>
+              <a:spcAft>
+                <a:spcPts val="1000"/>
+              </a:spcAft>
+              <a:buSzPct val="100000"/>
               <a:buChar char="•"/>
               <a:lnSpc>
                 <a:spcPts val="2200"/>
@@ -15937,10 +16109,12 @@
             </a:r>
           </a:p>
           <a:p>
-            <a:pPr>
-              <a:spcAft>
-                <a:spcPts val="1000"/>
-              </a:spcAft>
+            <a:pPr lvl="0" marL="457200" indent="-228600">
+              <a:buFont typeface="Calibri"/>
+              <a:spcAft>
+                <a:spcPts val="1000"/>
+              </a:spcAft>
+              <a:buSzPct val="100000"/>
               <a:buChar char="•"/>
               <a:lnSpc>
                 <a:spcPts val="2200"/>
@@ -15957,10 +16131,12 @@
             </a:r>
           </a:p>
           <a:p>
-            <a:pPr>
-              <a:spcAft>
-                <a:spcPts val="1000"/>
-              </a:spcAft>
+            <a:pPr lvl="0" marL="457200" indent="-228600">
+              <a:buFont typeface="Calibri"/>
+              <a:spcAft>
+                <a:spcPts val="1000"/>
+              </a:spcAft>
+              <a:buSzPct val="100000"/>
               <a:buChar char="•"/>
               <a:lnSpc>
                 <a:spcPts val="2200"/>
@@ -16096,10 +16272,12 @@
           </a:bodyPr>
           <a:lstStyle/>
           <a:p>
-            <a:pPr>
-              <a:spcAft>
-                <a:spcPts val="1000"/>
-              </a:spcAft>
+            <a:pPr lvl="0" marL="457200" indent="-228600">
+              <a:buFont typeface="Calibri"/>
+              <a:spcAft>
+                <a:spcPts val="1000"/>
+              </a:spcAft>
+              <a:buSzPct val="100000"/>
               <a:buChar char="•"/>
               <a:lnSpc>
                 <a:spcPts val="2200"/>
@@ -16116,10 +16294,12 @@
             </a:r>
           </a:p>
           <a:p>
-            <a:pPr>
-              <a:spcAft>
-                <a:spcPts val="1000"/>
-              </a:spcAft>
+            <a:pPr lvl="0" marL="457200" indent="-228600">
+              <a:buFont typeface="Calibri"/>
+              <a:spcAft>
+                <a:spcPts val="1000"/>
+              </a:spcAft>
+              <a:buSzPct val="100000"/>
               <a:buChar char="•"/>
               <a:lnSpc>
                 <a:spcPts val="2200"/>
@@ -16136,10 +16316,12 @@
             </a:r>
           </a:p>
           <a:p>
-            <a:pPr>
-              <a:spcAft>
-                <a:spcPts val="1000"/>
-              </a:spcAft>
+            <a:pPr lvl="0" marL="457200" indent="-228600">
+              <a:buFont typeface="Calibri"/>
+              <a:spcAft>
+                <a:spcPts val="1000"/>
+              </a:spcAft>
+              <a:buSzPct val="100000"/>
               <a:buChar char="•"/>
               <a:lnSpc>
                 <a:spcPts val="2200"/>
@@ -16275,10 +16457,12 @@
           </a:bodyPr>
           <a:lstStyle/>
           <a:p>
-            <a:pPr>
-              <a:spcAft>
-                <a:spcPts val="1000"/>
-              </a:spcAft>
+            <a:pPr lvl="0" marL="457200" indent="-228600">
+              <a:buFont typeface="Calibri"/>
+              <a:spcAft>
+                <a:spcPts val="1000"/>
+              </a:spcAft>
+              <a:buSzPct val="100000"/>
               <a:buChar char="•"/>
               <a:lnSpc>
                 <a:spcPts val="2200"/>
@@ -16295,10 +16479,12 @@
             </a:r>
           </a:p>
           <a:p>
-            <a:pPr>
-              <a:spcAft>
-                <a:spcPts val="1000"/>
-              </a:spcAft>
+            <a:pPr lvl="0" marL="457200" indent="-228600">
+              <a:buFont typeface="Calibri"/>
+              <a:spcAft>
+                <a:spcPts val="1000"/>
+              </a:spcAft>
+              <a:buSzPct val="100000"/>
               <a:buChar char="•"/>
               <a:lnSpc>
                 <a:spcPts val="2200"/>
@@ -16315,10 +16501,12 @@
             </a:r>
           </a:p>
           <a:p>
-            <a:pPr>
-              <a:spcAft>
-                <a:spcPts val="1000"/>
-              </a:spcAft>
+            <a:pPr lvl="0" marL="457200" indent="-228600">
+              <a:buFont typeface="Calibri"/>
+              <a:spcAft>
+                <a:spcPts val="1000"/>
+              </a:spcAft>
+              <a:buSzPct val="100000"/>
               <a:buChar char="•"/>
               <a:lnSpc>
                 <a:spcPts val="2200"/>
@@ -16335,10 +16523,12 @@
             </a:r>
           </a:p>
           <a:p>
-            <a:pPr>
-              <a:spcAft>
-                <a:spcPts val="1000"/>
-              </a:spcAft>
+            <a:pPr lvl="0" marL="457200" indent="-228600">
+              <a:buFont typeface="Calibri"/>
+              <a:spcAft>
+                <a:spcPts val="1000"/>
+              </a:spcAft>
+              <a:buSzPct val="100000"/>
               <a:buChar char="•"/>
               <a:lnSpc>
                 <a:spcPts val="2200"/>
@@ -16355,10 +16545,12 @@
             </a:r>
           </a:p>
           <a:p>
-            <a:pPr>
-              <a:spcAft>
-                <a:spcPts val="1000"/>
-              </a:spcAft>
+            <a:pPr lvl="0" marL="457200" indent="-228600">
+              <a:buFont typeface="Calibri"/>
+              <a:spcAft>
+                <a:spcPts val="1000"/>
+              </a:spcAft>
+              <a:buSzPct val="100000"/>
               <a:buChar char="•"/>
               <a:lnSpc>
                 <a:spcPts val="2200"/>
@@ -16494,10 +16686,12 @@
           </a:bodyPr>
           <a:lstStyle/>
           <a:p>
-            <a:pPr>
-              <a:spcAft>
-                <a:spcPts val="1000"/>
-              </a:spcAft>
+            <a:pPr lvl="0" marL="457200" indent="-228600">
+              <a:buFont typeface="Calibri"/>
+              <a:spcAft>
+                <a:spcPts val="1000"/>
+              </a:spcAft>
+              <a:buSzPct val="100000"/>
               <a:buChar char="•"/>
               <a:lnSpc>
                 <a:spcPts val="2200"/>
@@ -16514,10 +16708,12 @@
             </a:r>
           </a:p>
           <a:p>
-            <a:pPr>
-              <a:spcAft>
-                <a:spcPts val="1000"/>
-              </a:spcAft>
+            <a:pPr lvl="0" marL="457200" indent="-228600">
+              <a:buFont typeface="Calibri"/>
+              <a:spcAft>
+                <a:spcPts val="1000"/>
+              </a:spcAft>
+              <a:buSzPct val="100000"/>
               <a:buChar char="•"/>
               <a:lnSpc>
                 <a:spcPts val="2200"/>
@@ -16534,10 +16730,12 @@
             </a:r>
           </a:p>
           <a:p>
-            <a:pPr>
-              <a:spcAft>
-                <a:spcPts val="1000"/>
-              </a:spcAft>
+            <a:pPr lvl="0" marL="457200" indent="-228600">
+              <a:buFont typeface="Calibri"/>
+              <a:spcAft>
+                <a:spcPts val="1000"/>
+              </a:spcAft>
+              <a:buSzPct val="100000"/>
               <a:buChar char="•"/>
               <a:lnSpc>
                 <a:spcPts val="2200"/>
@@ -16554,10 +16752,12 @@
             </a:r>
           </a:p>
           <a:p>
-            <a:pPr>
-              <a:spcAft>
-                <a:spcPts val="1000"/>
-              </a:spcAft>
+            <a:pPr lvl="0" marL="457200" indent="-228600">
+              <a:buFont typeface="Calibri"/>
+              <a:spcAft>
+                <a:spcPts val="1000"/>
+              </a:spcAft>
+              <a:buSzPct val="100000"/>
               <a:buChar char="•"/>
               <a:lnSpc>
                 <a:spcPts val="2200"/>
@@ -16574,10 +16774,12 @@
             </a:r>
           </a:p>
           <a:p>
-            <a:pPr>
-              <a:spcAft>
-                <a:spcPts val="1000"/>
-              </a:spcAft>
+            <a:pPr lvl="0" marL="457200" indent="-228600">
+              <a:buFont typeface="Calibri"/>
+              <a:spcAft>
+                <a:spcPts val="1000"/>
+              </a:spcAft>
+              <a:buSzPct val="100000"/>
               <a:buChar char="•"/>
               <a:lnSpc>
                 <a:spcPts val="2200"/>
@@ -16713,10 +16915,12 @@
           </a:bodyPr>
           <a:lstStyle/>
           <a:p>
-            <a:pPr>
-              <a:spcAft>
-                <a:spcPts val="1000"/>
-              </a:spcAft>
+            <a:pPr lvl="0" marL="457200" indent="-228600">
+              <a:buFont typeface="Calibri"/>
+              <a:spcAft>
+                <a:spcPts val="1000"/>
+              </a:spcAft>
+              <a:buSzPct val="100000"/>
               <a:buChar char="•"/>
               <a:lnSpc>
                 <a:spcPts val="2200"/>
@@ -16733,10 +16937,12 @@
             </a:r>
           </a:p>
           <a:p>
-            <a:pPr>
-              <a:spcAft>
-                <a:spcPts val="1000"/>
-              </a:spcAft>
+            <a:pPr lvl="0" marL="457200" indent="-228600">
+              <a:buFont typeface="Calibri"/>
+              <a:spcAft>
+                <a:spcPts val="1000"/>
+              </a:spcAft>
+              <a:buSzPct val="100000"/>
               <a:buChar char="•"/>
               <a:lnSpc>
                 <a:spcPts val="2200"/>
@@ -16753,10 +16959,12 @@
             </a:r>
           </a:p>
           <a:p>
-            <a:pPr>
-              <a:spcAft>
-                <a:spcPts val="1000"/>
-              </a:spcAft>
+            <a:pPr lvl="0" marL="457200" indent="-228600">
+              <a:buFont typeface="Calibri"/>
+              <a:spcAft>
+                <a:spcPts val="1000"/>
+              </a:spcAft>
+              <a:buSzPct val="100000"/>
               <a:buChar char="•"/>
               <a:lnSpc>
                 <a:spcPts val="2200"/>
@@ -16892,10 +17100,12 @@
           </a:bodyPr>
           <a:lstStyle/>
           <a:p>
-            <a:pPr>
-              <a:spcAft>
-                <a:spcPts val="1000"/>
-              </a:spcAft>
+            <a:pPr lvl="0" marL="457200" indent="-228600">
+              <a:buFont typeface="Calibri"/>
+              <a:spcAft>
+                <a:spcPts val="1000"/>
+              </a:spcAft>
+              <a:buSzPct val="100000"/>
               <a:buChar char="•"/>
               <a:lnSpc>
                 <a:spcPts val="2200"/>
@@ -16912,10 +17122,12 @@
             </a:r>
           </a:p>
           <a:p>
-            <a:pPr>
-              <a:spcAft>
-                <a:spcPts val="1000"/>
-              </a:spcAft>
+            <a:pPr lvl="0" marL="457200" indent="-228600">
+              <a:buFont typeface="Calibri"/>
+              <a:spcAft>
+                <a:spcPts val="1000"/>
+              </a:spcAft>
+              <a:buSzPct val="100000"/>
               <a:buChar char="•"/>
               <a:lnSpc>
                 <a:spcPts val="2200"/>
@@ -16932,10 +17144,12 @@
             </a:r>
           </a:p>
           <a:p>
-            <a:pPr>
-              <a:spcAft>
-                <a:spcPts val="1000"/>
-              </a:spcAft>
+            <a:pPr lvl="0" marL="457200" indent="-228600">
+              <a:buFont typeface="Calibri"/>
+              <a:spcAft>
+                <a:spcPts val="1000"/>
+              </a:spcAft>
+              <a:buSzPct val="100000"/>
               <a:buChar char="•"/>
               <a:lnSpc>
                 <a:spcPts val="2200"/>
@@ -17071,10 +17285,12 @@
           </a:bodyPr>
           <a:lstStyle/>
           <a:p>
-            <a:pPr>
-              <a:spcAft>
-                <a:spcPts val="1000"/>
-              </a:spcAft>
+            <a:pPr lvl="0" marL="457200" indent="-228600">
+              <a:buFont typeface="Calibri"/>
+              <a:spcAft>
+                <a:spcPts val="1000"/>
+              </a:spcAft>
+              <a:buSzPct val="100000"/>
               <a:buChar char="•"/>
               <a:lnSpc>
                 <a:spcPts val="2200"/>
@@ -17091,10 +17307,12 @@
             </a:r>
           </a:p>
           <a:p>
-            <a:pPr>
-              <a:spcAft>
-                <a:spcPts val="1000"/>
-              </a:spcAft>
+            <a:pPr lvl="0" marL="457200" indent="-228600">
+              <a:buFont typeface="Calibri"/>
+              <a:spcAft>
+                <a:spcPts val="1000"/>
+              </a:spcAft>
+              <a:buSzPct val="100000"/>
               <a:buChar char="•"/>
               <a:lnSpc>
                 <a:spcPts val="2200"/>
@@ -17111,10 +17329,12 @@
             </a:r>
           </a:p>
           <a:p>
-            <a:pPr>
-              <a:spcAft>
-                <a:spcPts val="1000"/>
-              </a:spcAft>
+            <a:pPr lvl="0" marL="457200" indent="-228600">
+              <a:buFont typeface="Calibri"/>
+              <a:spcAft>
+                <a:spcPts val="1000"/>
+              </a:spcAft>
+              <a:buSzPct val="100000"/>
               <a:buChar char="•"/>
               <a:lnSpc>
                 <a:spcPts val="2200"/>
@@ -17250,10 +17470,12 @@
           </a:bodyPr>
           <a:lstStyle/>
           <a:p>
-            <a:pPr>
-              <a:spcAft>
-                <a:spcPts val="1000"/>
-              </a:spcAft>
+            <a:pPr lvl="0" marL="457200" indent="-228600">
+              <a:buFont typeface="Calibri"/>
+              <a:spcAft>
+                <a:spcPts val="1000"/>
+              </a:spcAft>
+              <a:buSzPct val="100000"/>
               <a:buChar char="•"/>
               <a:lnSpc>
                 <a:spcPts val="2200"/>
@@ -17270,10 +17492,12 @@
             </a:r>
           </a:p>
           <a:p>
-            <a:pPr>
-              <a:spcAft>
-                <a:spcPts val="1000"/>
-              </a:spcAft>
+            <a:pPr lvl="0" marL="457200" indent="-228600">
+              <a:buFont typeface="Calibri"/>
+              <a:spcAft>
+                <a:spcPts val="1000"/>
+              </a:spcAft>
+              <a:buSzPct val="100000"/>
               <a:buChar char="•"/>
               <a:lnSpc>
                 <a:spcPts val="2200"/>
@@ -17290,10 +17514,12 @@
             </a:r>
           </a:p>
           <a:p>
-            <a:pPr>
-              <a:spcAft>
-                <a:spcPts val="1000"/>
-              </a:spcAft>
+            <a:pPr lvl="0" marL="457200" indent="-228600">
+              <a:buFont typeface="Calibri"/>
+              <a:spcAft>
+                <a:spcPts val="1000"/>
+              </a:spcAft>
+              <a:buSzPct val="100000"/>
               <a:buChar char="•"/>
               <a:lnSpc>
                 <a:spcPts val="2200"/>
@@ -17429,10 +17655,12 @@
           </a:bodyPr>
           <a:lstStyle/>
           <a:p>
-            <a:pPr>
-              <a:spcAft>
-                <a:spcPts val="1000"/>
-              </a:spcAft>
+            <a:pPr lvl="0" marL="457200" indent="-228600">
+              <a:buFont typeface="Calibri"/>
+              <a:spcAft>
+                <a:spcPts val="1000"/>
+              </a:spcAft>
+              <a:buSzPct val="100000"/>
               <a:buChar char="•"/>
               <a:lnSpc>
                 <a:spcPts val="2200"/>
@@ -17449,10 +17677,12 @@
             </a:r>
           </a:p>
           <a:p>
-            <a:pPr>
-              <a:spcAft>
-                <a:spcPts val="1000"/>
-              </a:spcAft>
+            <a:pPr lvl="0" marL="457200" indent="-228600">
+              <a:buFont typeface="Calibri"/>
+              <a:spcAft>
+                <a:spcPts val="1000"/>
+              </a:spcAft>
+              <a:buSzPct val="100000"/>
               <a:buChar char="•"/>
               <a:lnSpc>
                 <a:spcPts val="2200"/>
@@ -17588,10 +17818,12 @@
           </a:bodyPr>
           <a:lstStyle/>
           <a:p>
-            <a:pPr>
-              <a:spcAft>
-                <a:spcPts val="1000"/>
-              </a:spcAft>
+            <a:pPr lvl="0" marL="457200" indent="-228600">
+              <a:buFont typeface="Calibri"/>
+              <a:spcAft>
+                <a:spcPts val="1000"/>
+              </a:spcAft>
+              <a:buSzPct val="100000"/>
               <a:buChar char="•"/>
               <a:lnSpc>
                 <a:spcPts val="2200"/>
@@ -17727,10 +17959,12 @@
           </a:bodyPr>
           <a:lstStyle/>
           <a:p>
-            <a:pPr>
-              <a:spcAft>
-                <a:spcPts val="1000"/>
-              </a:spcAft>
+            <a:pPr lvl="0" marL="457200" indent="-228600">
+              <a:buFont typeface="Calibri"/>
+              <a:spcAft>
+                <a:spcPts val="1000"/>
+              </a:spcAft>
+              <a:buSzPct val="100000"/>
               <a:buChar char="•"/>
               <a:lnSpc>
                 <a:spcPts val="2200"/>
@@ -17747,10 +17981,12 @@
             </a:r>
           </a:p>
           <a:p>
-            <a:pPr>
-              <a:spcAft>
-                <a:spcPts val="1000"/>
-              </a:spcAft>
+            <a:pPr lvl="0" marL="457200" indent="-228600">
+              <a:buFont typeface="Calibri"/>
+              <a:spcAft>
+                <a:spcPts val="1000"/>
+              </a:spcAft>
+              <a:buSzPct val="100000"/>
               <a:buChar char="•"/>
               <a:lnSpc>
                 <a:spcPts val="2200"/>
@@ -17767,10 +18003,12 @@
             </a:r>
           </a:p>
           <a:p>
-            <a:pPr>
-              <a:spcAft>
-                <a:spcPts val="1000"/>
-              </a:spcAft>
+            <a:pPr lvl="0" marL="457200" indent="-228600">
+              <a:buFont typeface="Calibri"/>
+              <a:spcAft>
+                <a:spcPts val="1000"/>
+              </a:spcAft>
+              <a:buSzPct val="100000"/>
               <a:buChar char="•"/>
               <a:lnSpc>
                 <a:spcPts val="2200"/>
@@ -17787,10 +18025,12 @@
             </a:r>
           </a:p>
           <a:p>
-            <a:pPr>
-              <a:spcAft>
-                <a:spcPts val="1000"/>
-              </a:spcAft>
+            <a:pPr lvl="0" marL="457200" indent="-228600">
+              <a:buFont typeface="Calibri"/>
+              <a:spcAft>
+                <a:spcPts val="1000"/>
+              </a:spcAft>
+              <a:buSzPct val="100000"/>
               <a:buChar char="•"/>
               <a:lnSpc>
                 <a:spcPts val="2200"/>
@@ -17807,10 +18047,12 @@
             </a:r>
           </a:p>
           <a:p>
-            <a:pPr>
-              <a:spcAft>
-                <a:spcPts val="1000"/>
-              </a:spcAft>
+            <a:pPr lvl="0" marL="457200" indent="-228600">
+              <a:buFont typeface="Calibri"/>
+              <a:spcAft>
+                <a:spcPts val="1000"/>
+              </a:spcAft>
+              <a:buSzPct val="100000"/>
               <a:buChar char="•"/>
               <a:lnSpc>
                 <a:spcPts val="2200"/>
@@ -18409,10 +18651,12 @@
           </a:bodyPr>
           <a:lstStyle/>
           <a:p>
-            <a:pPr>
-              <a:spcAft>
-                <a:spcPts val="1000"/>
-              </a:spcAft>
+            <a:pPr lvl="0" marL="457200" indent="-228600">
+              <a:buFont typeface="Calibri"/>
+              <a:spcAft>
+                <a:spcPts val="1000"/>
+              </a:spcAft>
+              <a:buSzPct val="100000"/>
               <a:buChar char="•"/>
               <a:lnSpc>
                 <a:spcPts val="2200"/>
@@ -18429,10 +18673,12 @@
             </a:r>
           </a:p>
           <a:p>
-            <a:pPr>
-              <a:spcAft>
-                <a:spcPts val="1000"/>
-              </a:spcAft>
+            <a:pPr lvl="0" marL="457200" indent="-228600">
+              <a:buFont typeface="Calibri"/>
+              <a:spcAft>
+                <a:spcPts val="1000"/>
+              </a:spcAft>
+              <a:buSzPct val="100000"/>
               <a:buChar char="•"/>
               <a:lnSpc>
                 <a:spcPts val="2200"/>
@@ -18449,10 +18695,12 @@
             </a:r>
           </a:p>
           <a:p>
-            <a:pPr>
-              <a:spcAft>
-                <a:spcPts val="1000"/>
-              </a:spcAft>
+            <a:pPr lvl="0" marL="457200" indent="-228600">
+              <a:buFont typeface="Calibri"/>
+              <a:spcAft>
+                <a:spcPts val="1000"/>
+              </a:spcAft>
+              <a:buSzPct val="100000"/>
               <a:buChar char="•"/>
               <a:lnSpc>
                 <a:spcPts val="2200"/>
@@ -18469,10 +18717,12 @@
             </a:r>
           </a:p>
           <a:p>
-            <a:pPr>
-              <a:spcAft>
-                <a:spcPts val="1000"/>
-              </a:spcAft>
+            <a:pPr lvl="0" marL="457200" indent="-228600">
+              <a:buFont typeface="Calibri"/>
+              <a:spcAft>
+                <a:spcPts val="1000"/>
+              </a:spcAft>
+              <a:buSzPct val="100000"/>
               <a:buChar char="•"/>
               <a:lnSpc>
                 <a:spcPts val="2200"/>
@@ -18489,10 +18739,12 @@
             </a:r>
           </a:p>
           <a:p>
-            <a:pPr>
-              <a:spcAft>
-                <a:spcPts val="1000"/>
-              </a:spcAft>
+            <a:pPr lvl="0" marL="457200" indent="-228600">
+              <a:buFont typeface="Calibri"/>
+              <a:spcAft>
+                <a:spcPts val="1000"/>
+              </a:spcAft>
+              <a:buSzPct val="100000"/>
               <a:buChar char="•"/>
               <a:lnSpc>
                 <a:spcPts val="2200"/>
@@ -18509,10 +18761,12 @@
             </a:r>
           </a:p>
           <a:p>
-            <a:pPr>
-              <a:spcAft>
-                <a:spcPts val="1000"/>
-              </a:spcAft>
+            <a:pPr lvl="0" marL="457200" indent="-228600">
+              <a:buFont typeface="Calibri"/>
+              <a:spcAft>
+                <a:spcPts val="1000"/>
+              </a:spcAft>
+              <a:buSzPct val="100000"/>
               <a:buChar char="•"/>
               <a:lnSpc>
                 <a:spcPts val="2200"/>
@@ -18648,10 +18902,12 @@
           </a:bodyPr>
           <a:lstStyle/>
           <a:p>
-            <a:pPr>
-              <a:spcAft>
-                <a:spcPts val="1000"/>
-              </a:spcAft>
+            <a:pPr lvl="0" marL="457200" indent="-228600">
+              <a:buFont typeface="Calibri"/>
+              <a:spcAft>
+                <a:spcPts val="1000"/>
+              </a:spcAft>
+              <a:buSzPct val="100000"/>
               <a:buChar char="•"/>
               <a:lnSpc>
                 <a:spcPts val="2200"/>
@@ -18668,10 +18924,12 @@
             </a:r>
           </a:p>
           <a:p>
-            <a:pPr>
-              <a:spcAft>
-                <a:spcPts val="1000"/>
-              </a:spcAft>
+            <a:pPr lvl="0" marL="457200" indent="-228600">
+              <a:buFont typeface="Calibri"/>
+              <a:spcAft>
+                <a:spcPts val="1000"/>
+              </a:spcAft>
+              <a:buSzPct val="100000"/>
               <a:buChar char="•"/>
               <a:lnSpc>
                 <a:spcPts val="2200"/>
@@ -18688,10 +18946,12 @@
             </a:r>
           </a:p>
           <a:p>
-            <a:pPr>
-              <a:spcAft>
-                <a:spcPts val="1000"/>
-              </a:spcAft>
+            <a:pPr lvl="0" marL="457200" indent="-228600">
+              <a:buFont typeface="Calibri"/>
+              <a:spcAft>
+                <a:spcPts val="1000"/>
+              </a:spcAft>
+              <a:buSzPct val="100000"/>
               <a:buChar char="•"/>
               <a:lnSpc>
                 <a:spcPts val="2200"/>
@@ -18708,10 +18968,12 @@
             </a:r>
           </a:p>
           <a:p>
-            <a:pPr>
-              <a:spcAft>
-                <a:spcPts val="1000"/>
-              </a:spcAft>
+            <a:pPr lvl="0" marL="457200" indent="-228600">
+              <a:buFont typeface="Calibri"/>
+              <a:spcAft>
+                <a:spcPts val="1000"/>
+              </a:spcAft>
+              <a:buSzPct val="100000"/>
               <a:buChar char="•"/>
               <a:lnSpc>
                 <a:spcPts val="2200"/>
@@ -18728,10 +18990,12 @@
             </a:r>
           </a:p>
           <a:p>
-            <a:pPr>
-              <a:spcAft>
-                <a:spcPts val="1000"/>
-              </a:spcAft>
+            <a:pPr lvl="0" marL="457200" indent="-228600">
+              <a:buFont typeface="Calibri"/>
+              <a:spcAft>
+                <a:spcPts val="1000"/>
+              </a:spcAft>
+              <a:buSzPct val="100000"/>
               <a:buChar char="•"/>
               <a:lnSpc>
                 <a:spcPts val="2200"/>
@@ -18867,10 +19131,12 @@
           </a:bodyPr>
           <a:lstStyle/>
           <a:p>
-            <a:pPr>
-              <a:spcAft>
-                <a:spcPts val="1000"/>
-              </a:spcAft>
+            <a:pPr lvl="0" marL="457200" indent="-228600">
+              <a:buFont typeface="Calibri"/>
+              <a:spcAft>
+                <a:spcPts val="1000"/>
+              </a:spcAft>
+              <a:buSzPct val="100000"/>
               <a:buChar char="•"/>
               <a:lnSpc>
                 <a:spcPts val="2200"/>
@@ -18887,10 +19153,12 @@
             </a:r>
           </a:p>
           <a:p>
-            <a:pPr>
-              <a:spcAft>
-                <a:spcPts val="1000"/>
-              </a:spcAft>
+            <a:pPr lvl="0" marL="457200" indent="-228600">
+              <a:buFont typeface="Calibri"/>
+              <a:spcAft>
+                <a:spcPts val="1000"/>
+              </a:spcAft>
+              <a:buSzPct val="100000"/>
               <a:buChar char="•"/>
               <a:lnSpc>
                 <a:spcPts val="2200"/>
@@ -18907,10 +19175,12 @@
             </a:r>
           </a:p>
           <a:p>
-            <a:pPr>
-              <a:spcAft>
-                <a:spcPts val="1000"/>
-              </a:spcAft>
+            <a:pPr lvl="0" marL="457200" indent="-228600">
+              <a:buFont typeface="Calibri"/>
+              <a:spcAft>
+                <a:spcPts val="1000"/>
+              </a:spcAft>
+              <a:buSzPct val="100000"/>
               <a:buChar char="•"/>
               <a:lnSpc>
                 <a:spcPts val="2200"/>
@@ -18927,10 +19197,12 @@
             </a:r>
           </a:p>
           <a:p>
-            <a:pPr>
-              <a:spcAft>
-                <a:spcPts val="1000"/>
-              </a:spcAft>
+            <a:pPr lvl="0" marL="457200" indent="-228600">
+              <a:buFont typeface="Calibri"/>
+              <a:spcAft>
+                <a:spcPts val="1000"/>
+              </a:spcAft>
+              <a:buSzPct val="100000"/>
               <a:buChar char="•"/>
               <a:lnSpc>
                 <a:spcPts val="2200"/>
@@ -18947,10 +19219,12 @@
             </a:r>
           </a:p>
           <a:p>
-            <a:pPr>
-              <a:spcAft>
-                <a:spcPts val="1000"/>
-              </a:spcAft>
+            <a:pPr lvl="0" marL="457200" indent="-228600">
+              <a:buFont typeface="Calibri"/>
+              <a:spcAft>
+                <a:spcPts val="1000"/>
+              </a:spcAft>
+              <a:buSzPct val="100000"/>
               <a:buChar char="•"/>
               <a:lnSpc>
                 <a:spcPts val="2200"/>
@@ -18967,10 +19241,12 @@
             </a:r>
           </a:p>
           <a:p>
-            <a:pPr>
-              <a:spcAft>
-                <a:spcPts val="1000"/>
-              </a:spcAft>
+            <a:pPr lvl="0" marL="457200" indent="-228600">
+              <a:buFont typeface="Calibri"/>
+              <a:spcAft>
+                <a:spcPts val="1000"/>
+              </a:spcAft>
+              <a:buSzPct val="100000"/>
               <a:buChar char="•"/>
               <a:lnSpc>
                 <a:spcPts val="2200"/>
@@ -19106,10 +19382,12 @@
           </a:bodyPr>
           <a:lstStyle/>
           <a:p>
-            <a:pPr>
-              <a:spcAft>
-                <a:spcPts val="1000"/>
-              </a:spcAft>
+            <a:pPr lvl="0" marL="457200" indent="-228600">
+              <a:buFont typeface="Calibri"/>
+              <a:spcAft>
+                <a:spcPts val="1000"/>
+              </a:spcAft>
+              <a:buSzPct val="100000"/>
               <a:buChar char="•"/>
               <a:lnSpc>
                 <a:spcPts val="2200"/>
@@ -19126,10 +19404,12 @@
             </a:r>
           </a:p>
           <a:p>
-            <a:pPr>
-              <a:spcAft>
-                <a:spcPts val="1000"/>
-              </a:spcAft>
+            <a:pPr lvl="0" marL="457200" indent="-228600">
+              <a:buFont typeface="Calibri"/>
+              <a:spcAft>
+                <a:spcPts val="1000"/>
+              </a:spcAft>
+              <a:buSzPct val="100000"/>
               <a:buChar char="•"/>
               <a:lnSpc>
                 <a:spcPts val="2200"/>
@@ -19146,10 +19426,12 @@
             </a:r>
           </a:p>
           <a:p>
-            <a:pPr>
-              <a:spcAft>
-                <a:spcPts val="1000"/>
-              </a:spcAft>
+            <a:pPr lvl="0" marL="457200" indent="-228600">
+              <a:buFont typeface="Calibri"/>
+              <a:spcAft>
+                <a:spcPts val="1000"/>
+              </a:spcAft>
+              <a:buSzPct val="100000"/>
               <a:buChar char="•"/>
               <a:lnSpc>
                 <a:spcPts val="2200"/>
@@ -19285,10 +19567,12 @@
           </a:bodyPr>
           <a:lstStyle/>
           <a:p>
-            <a:pPr>
-              <a:spcAft>
-                <a:spcPts val="1000"/>
-              </a:spcAft>
+            <a:pPr lvl="0" marL="457200" indent="-228600">
+              <a:buFont typeface="Calibri"/>
+              <a:spcAft>
+                <a:spcPts val="1000"/>
+              </a:spcAft>
+              <a:buSzPct val="100000"/>
               <a:buChar char="•"/>
               <a:lnSpc>
                 <a:spcPts val="2200"/>
@@ -19305,10 +19589,12 @@
             </a:r>
           </a:p>
           <a:p>
-            <a:pPr>
-              <a:spcAft>
-                <a:spcPts val="1000"/>
-              </a:spcAft>
+            <a:pPr lvl="0" marL="457200" indent="-228600">
+              <a:buFont typeface="Calibri"/>
+              <a:spcAft>
+                <a:spcPts val="1000"/>
+              </a:spcAft>
+              <a:buSzPct val="100000"/>
               <a:buChar char="•"/>
               <a:lnSpc>
                 <a:spcPts val="2200"/>
@@ -19325,10 +19611,12 @@
             </a:r>
           </a:p>
           <a:p>
-            <a:pPr>
-              <a:spcAft>
-                <a:spcPts val="1000"/>
-              </a:spcAft>
+            <a:pPr lvl="0" marL="457200" indent="-228600">
+              <a:buFont typeface="Calibri"/>
+              <a:spcAft>
+                <a:spcPts val="1000"/>
+              </a:spcAft>
+              <a:buSzPct val="100000"/>
               <a:buChar char="•"/>
               <a:lnSpc>
                 <a:spcPts val="2200"/>
@@ -19464,10 +19752,12 @@
           </a:bodyPr>
           <a:lstStyle/>
           <a:p>
-            <a:pPr>
-              <a:spcAft>
-                <a:spcPts val="1000"/>
-              </a:spcAft>
+            <a:pPr lvl="0" marL="457200" indent="-228600">
+              <a:buFont typeface="Calibri"/>
+              <a:spcAft>
+                <a:spcPts val="1000"/>
+              </a:spcAft>
+              <a:buSzPct val="100000"/>
               <a:buChar char="•"/>
               <a:lnSpc>
                 <a:spcPts val="2200"/>
@@ -19484,10 +19774,12 @@
             </a:r>
           </a:p>
           <a:p>
-            <a:pPr>
-              <a:spcAft>
-                <a:spcPts val="1000"/>
-              </a:spcAft>
+            <a:pPr lvl="0" marL="457200" indent="-228600">
+              <a:buFont typeface="Calibri"/>
+              <a:spcAft>
+                <a:spcPts val="1000"/>
+              </a:spcAft>
+              <a:buSzPct val="100000"/>
               <a:buChar char="•"/>
               <a:lnSpc>
                 <a:spcPts val="2200"/>
@@ -19504,10 +19796,12 @@
             </a:r>
           </a:p>
           <a:p>
-            <a:pPr>
-              <a:spcAft>
-                <a:spcPts val="1000"/>
-              </a:spcAft>
+            <a:pPr lvl="0" marL="457200" indent="-228600">
+              <a:buFont typeface="Calibri"/>
+              <a:spcAft>
+                <a:spcPts val="1000"/>
+              </a:spcAft>
+              <a:buSzPct val="100000"/>
               <a:buChar char="•"/>
               <a:lnSpc>
                 <a:spcPts val="2200"/>
@@ -19524,10 +19818,12 @@
             </a:r>
           </a:p>
           <a:p>
-            <a:pPr>
-              <a:spcAft>
-                <a:spcPts val="1000"/>
-              </a:spcAft>
+            <a:pPr lvl="0" marL="457200" indent="-228600">
+              <a:buFont typeface="Calibri"/>
+              <a:spcAft>
+                <a:spcPts val="1000"/>
+              </a:spcAft>
+              <a:buSzPct val="100000"/>
               <a:buChar char="•"/>
               <a:lnSpc>
                 <a:spcPts val="2200"/>
@@ -19544,10 +19840,12 @@
             </a:r>
           </a:p>
           <a:p>
-            <a:pPr>
-              <a:spcAft>
-                <a:spcPts val="1000"/>
-              </a:spcAft>
+            <a:pPr lvl="0" marL="457200" indent="-228600">
+              <a:buFont typeface="Calibri"/>
+              <a:spcAft>
+                <a:spcPts val="1000"/>
+              </a:spcAft>
+              <a:buSzPct val="100000"/>
               <a:buChar char="•"/>
               <a:lnSpc>
                 <a:spcPts val="2200"/>
@@ -19683,10 +19981,12 @@
           </a:bodyPr>
           <a:lstStyle/>
           <a:p>
-            <a:pPr>
-              <a:spcAft>
-                <a:spcPts val="1000"/>
-              </a:spcAft>
+            <a:pPr lvl="0" marL="457200" indent="-228600">
+              <a:buFont typeface="Calibri"/>
+              <a:spcAft>
+                <a:spcPts val="1000"/>
+              </a:spcAft>
+              <a:buSzPct val="100000"/>
               <a:buChar char="•"/>
               <a:lnSpc>
                 <a:spcPts val="2200"/>
@@ -19703,10 +20003,12 @@
             </a:r>
           </a:p>
           <a:p>
-            <a:pPr>
-              <a:spcAft>
-                <a:spcPts val="1000"/>
-              </a:spcAft>
+            <a:pPr lvl="0" marL="457200" indent="-228600">
+              <a:buFont typeface="Calibri"/>
+              <a:spcAft>
+                <a:spcPts val="1000"/>
+              </a:spcAft>
+              <a:buSzPct val="100000"/>
               <a:buChar char="•"/>
               <a:lnSpc>
                 <a:spcPts val="2200"/>
@@ -19723,10 +20025,12 @@
             </a:r>
           </a:p>
           <a:p>
-            <a:pPr>
-              <a:spcAft>
-                <a:spcPts val="1000"/>
-              </a:spcAft>
+            <a:pPr lvl="0" marL="457200" indent="-228600">
+              <a:buFont typeface="Calibri"/>
+              <a:spcAft>
+                <a:spcPts val="1000"/>
+              </a:spcAft>
+              <a:buSzPct val="100000"/>
               <a:buChar char="•"/>
               <a:lnSpc>
                 <a:spcPts val="2200"/>
@@ -19743,10 +20047,12 @@
             </a:r>
           </a:p>
           <a:p>
-            <a:pPr>
-              <a:spcAft>
-                <a:spcPts val="1000"/>
-              </a:spcAft>
+            <a:pPr lvl="0" marL="457200" indent="-228600">
+              <a:buFont typeface="Calibri"/>
+              <a:spcAft>
+                <a:spcPts val="1000"/>
+              </a:spcAft>
+              <a:buSzPct val="100000"/>
               <a:buChar char="•"/>
               <a:lnSpc>
                 <a:spcPts val="2200"/>
@@ -19763,10 +20069,12 @@
             </a:r>
           </a:p>
           <a:p>
-            <a:pPr>
-              <a:spcAft>
-                <a:spcPts val="1000"/>
-              </a:spcAft>
+            <a:pPr lvl="0" marL="457200" indent="-228600">
+              <a:buFont typeface="Calibri"/>
+              <a:spcAft>
+                <a:spcPts val="1000"/>
+              </a:spcAft>
+              <a:buSzPct val="100000"/>
               <a:buChar char="•"/>
               <a:lnSpc>
                 <a:spcPts val="2200"/>
@@ -19902,10 +20210,12 @@
           </a:bodyPr>
           <a:lstStyle/>
           <a:p>
-            <a:pPr>
-              <a:spcAft>
-                <a:spcPts val="1000"/>
-              </a:spcAft>
+            <a:pPr lvl="0" marL="457200" indent="-228600">
+              <a:buFont typeface="Calibri"/>
+              <a:spcAft>
+                <a:spcPts val="1000"/>
+              </a:spcAft>
+              <a:buSzPct val="100000"/>
               <a:buChar char="•"/>
               <a:lnSpc>
                 <a:spcPts val="2200"/>
@@ -19922,10 +20232,12 @@
             </a:r>
           </a:p>
           <a:p>
-            <a:pPr>
-              <a:spcAft>
-                <a:spcPts val="1000"/>
-              </a:spcAft>
+            <a:pPr lvl="0" marL="457200" indent="-228600">
+              <a:buFont typeface="Calibri"/>
+              <a:spcAft>
+                <a:spcPts val="1000"/>
+              </a:spcAft>
+              <a:buSzPct val="100000"/>
               <a:buChar char="•"/>
               <a:lnSpc>
                 <a:spcPts val="2200"/>
@@ -20061,10 +20373,12 @@
           </a:bodyPr>
           <a:lstStyle/>
           <a:p>
-            <a:pPr>
-              <a:spcAft>
-                <a:spcPts val="1000"/>
-              </a:spcAft>
+            <a:pPr lvl="0" marL="457200" indent="-228600">
+              <a:buFont typeface="Calibri"/>
+              <a:spcAft>
+                <a:spcPts val="1000"/>
+              </a:spcAft>
+              <a:buSzPct val="100000"/>
               <a:buChar char="•"/>
               <a:lnSpc>
                 <a:spcPts val="2200"/>
@@ -20200,10 +20514,12 @@
           </a:bodyPr>
           <a:lstStyle/>
           <a:p>
-            <a:pPr>
-              <a:spcAft>
-                <a:spcPts val="1000"/>
-              </a:spcAft>
+            <a:pPr lvl="0" marL="457200" indent="-228600">
+              <a:buFont typeface="Calibri"/>
+              <a:spcAft>
+                <a:spcPts val="1000"/>
+              </a:spcAft>
+              <a:buSzPct val="100000"/>
               <a:buChar char="•"/>
               <a:lnSpc>
                 <a:spcPts val="2200"/>
@@ -20220,10 +20536,12 @@
             </a:r>
           </a:p>
           <a:p>
-            <a:pPr>
-              <a:spcAft>
-                <a:spcPts val="1000"/>
-              </a:spcAft>
+            <a:pPr lvl="0" marL="457200" indent="-228600">
+              <a:buFont typeface="Calibri"/>
+              <a:spcAft>
+                <a:spcPts val="1000"/>
+              </a:spcAft>
+              <a:buSzPct val="100000"/>
               <a:buChar char="•"/>
               <a:lnSpc>
                 <a:spcPts val="2200"/>
@@ -20240,10 +20558,12 @@
             </a:r>
           </a:p>
           <a:p>
-            <a:pPr>
-              <a:spcAft>
-                <a:spcPts val="1000"/>
-              </a:spcAft>
+            <a:pPr lvl="0" marL="457200" indent="-228600">
+              <a:buFont typeface="Calibri"/>
+              <a:spcAft>
+                <a:spcPts val="1000"/>
+              </a:spcAft>
+              <a:buSzPct val="100000"/>
               <a:buChar char="•"/>
               <a:lnSpc>
                 <a:spcPts val="2200"/>
@@ -20260,10 +20580,12 @@
             </a:r>
           </a:p>
           <a:p>
-            <a:pPr>
-              <a:spcAft>
-                <a:spcPts val="1000"/>
-              </a:spcAft>
+            <a:pPr lvl="0" marL="457200" indent="-228600">
+              <a:buFont typeface="Calibri"/>
+              <a:spcAft>
+                <a:spcPts val="1000"/>
+              </a:spcAft>
+              <a:buSzPct val="100000"/>
               <a:buChar char="•"/>
               <a:lnSpc>
                 <a:spcPts val="2200"/>
@@ -20280,10 +20602,12 @@
             </a:r>
           </a:p>
           <a:p>
-            <a:pPr>
-              <a:spcAft>
-                <a:spcPts val="1000"/>
-              </a:spcAft>
+            <a:pPr lvl="0" marL="457200" indent="-228600">
+              <a:buFont typeface="Calibri"/>
+              <a:spcAft>
+                <a:spcPts val="1000"/>
+              </a:spcAft>
+              <a:buSzPct val="100000"/>
               <a:buChar char="•"/>
               <a:lnSpc>
                 <a:spcPts val="2200"/>
@@ -20419,10 +20743,12 @@
           </a:bodyPr>
           <a:lstStyle/>
           <a:p>
-            <a:pPr>
-              <a:spcAft>
-                <a:spcPts val="1000"/>
-              </a:spcAft>
+            <a:pPr lvl="0" marL="457200" indent="-228600">
+              <a:buFont typeface="Calibri"/>
+              <a:spcAft>
+                <a:spcPts val="1000"/>
+              </a:spcAft>
+              <a:buSzPct val="100000"/>
               <a:buChar char="•"/>
               <a:lnSpc>
                 <a:spcPts val="2200"/>
@@ -20439,10 +20765,12 @@
             </a:r>
           </a:p>
           <a:p>
-            <a:pPr>
-              <a:spcAft>
-                <a:spcPts val="1000"/>
-              </a:spcAft>
+            <a:pPr lvl="0" marL="457200" indent="-228600">
+              <a:buFont typeface="Calibri"/>
+              <a:spcAft>
+                <a:spcPts val="1000"/>
+              </a:spcAft>
+              <a:buSzPct val="100000"/>
               <a:buChar char="•"/>
               <a:lnSpc>
                 <a:spcPts val="2200"/>
@@ -20459,10 +20787,12 @@
             </a:r>
           </a:p>
           <a:p>
-            <a:pPr>
-              <a:spcAft>
-                <a:spcPts val="1000"/>
-              </a:spcAft>
+            <a:pPr lvl="0" marL="457200" indent="-228600">
+              <a:buFont typeface="Calibri"/>
+              <a:spcAft>
+                <a:spcPts val="1000"/>
+              </a:spcAft>
+              <a:buSzPct val="100000"/>
               <a:buChar char="•"/>
               <a:lnSpc>
                 <a:spcPts val="2200"/>
@@ -20479,10 +20809,12 @@
             </a:r>
           </a:p>
           <a:p>
-            <a:pPr>
-              <a:spcAft>
-                <a:spcPts val="1000"/>
-              </a:spcAft>
+            <a:pPr lvl="0" marL="457200" indent="-228600">
+              <a:buFont typeface="Calibri"/>
+              <a:spcAft>
+                <a:spcPts val="1000"/>
+              </a:spcAft>
+              <a:buSzPct val="100000"/>
               <a:buChar char="•"/>
               <a:lnSpc>
                 <a:spcPts val="2200"/>
@@ -20499,10 +20831,12 @@
             </a:r>
           </a:p>
           <a:p>
-            <a:pPr>
-              <a:spcAft>
-                <a:spcPts val="1000"/>
-              </a:spcAft>
+            <a:pPr lvl="0" marL="457200" indent="-228600">
+              <a:buFont typeface="Calibri"/>
+              <a:spcAft>
+                <a:spcPts val="1000"/>
+              </a:spcAft>
+              <a:buSzPct val="100000"/>
               <a:buChar char="•"/>
               <a:lnSpc>
                 <a:spcPts val="2200"/>
@@ -20519,10 +20853,12 @@
             </a:r>
           </a:p>
           <a:p>
-            <a:pPr>
-              <a:spcAft>
-                <a:spcPts val="1000"/>
-              </a:spcAft>
+            <a:pPr lvl="0" marL="457200" indent="-228600">
+              <a:buFont typeface="Calibri"/>
+              <a:spcAft>
+                <a:spcPts val="1000"/>
+              </a:spcAft>
+              <a:buSzPct val="100000"/>
               <a:buChar char="•"/>
               <a:lnSpc>
                 <a:spcPts val="2200"/>
@@ -20658,10 +20994,12 @@
           </a:bodyPr>
           <a:lstStyle/>
           <a:p>
-            <a:pPr>
-              <a:spcAft>
-                <a:spcPts val="1000"/>
-              </a:spcAft>
+            <a:pPr lvl="0" marL="457200" indent="-228600">
+              <a:buFont typeface="Calibri"/>
+              <a:spcAft>
+                <a:spcPts val="1000"/>
+              </a:spcAft>
+              <a:buSzPct val="100000"/>
               <a:buChar char="•"/>
               <a:lnSpc>
                 <a:spcPts val="2200"/>
@@ -20678,10 +21016,12 @@
             </a:r>
           </a:p>
           <a:p>
-            <a:pPr>
-              <a:spcAft>
-                <a:spcPts val="1000"/>
-              </a:spcAft>
+            <a:pPr lvl="0" marL="457200" indent="-228600">
+              <a:buFont typeface="Calibri"/>
+              <a:spcAft>
+                <a:spcPts val="1000"/>
+              </a:spcAft>
+              <a:buSzPct val="100000"/>
               <a:buChar char="•"/>
               <a:lnSpc>
                 <a:spcPts val="2200"/>
@@ -20698,10 +21038,12 @@
             </a:r>
           </a:p>
           <a:p>
-            <a:pPr>
-              <a:spcAft>
-                <a:spcPts val="1000"/>
-              </a:spcAft>
+            <a:pPr lvl="0" marL="457200" indent="-228600">
+              <a:buFont typeface="Calibri"/>
+              <a:spcAft>
+                <a:spcPts val="1000"/>
+              </a:spcAft>
+              <a:buSzPct val="100000"/>
               <a:buChar char="•"/>
               <a:lnSpc>
                 <a:spcPts val="2200"/>
@@ -20718,10 +21060,12 @@
             </a:r>
           </a:p>
           <a:p>
-            <a:pPr>
-              <a:spcAft>
-                <a:spcPts val="1000"/>
-              </a:spcAft>
+            <a:pPr lvl="0" marL="457200" indent="-228600">
+              <a:buFont typeface="Calibri"/>
+              <a:spcAft>
+                <a:spcPts val="1000"/>
+              </a:spcAft>
+              <a:buSzPct val="100000"/>
               <a:buChar char="•"/>
               <a:lnSpc>
                 <a:spcPts val="2200"/>
@@ -20857,10 +21201,12 @@
           </a:bodyPr>
           <a:lstStyle/>
           <a:p>
-            <a:pPr>
-              <a:spcAft>
-                <a:spcPts val="1000"/>
-              </a:spcAft>
+            <a:pPr lvl="0" marL="457200" indent="-228600">
+              <a:buFont typeface="Calibri"/>
+              <a:spcAft>
+                <a:spcPts val="1000"/>
+              </a:spcAft>
+              <a:buSzPct val="100000"/>
               <a:buChar char="•"/>
               <a:lnSpc>
                 <a:spcPts val="2200"/>
@@ -20877,10 +21223,12 @@
             </a:r>
           </a:p>
           <a:p>
-            <a:pPr>
-              <a:spcAft>
-                <a:spcPts val="1000"/>
-              </a:spcAft>
+            <a:pPr lvl="0" marL="457200" indent="-228600">
+              <a:buFont typeface="Calibri"/>
+              <a:spcAft>
+                <a:spcPts val="1000"/>
+              </a:spcAft>
+              <a:buSzPct val="100000"/>
               <a:buChar char="•"/>
               <a:lnSpc>
                 <a:spcPts val="2200"/>
@@ -20897,10 +21245,12 @@
             </a:r>
           </a:p>
           <a:p>
-            <a:pPr>
-              <a:spcAft>
-                <a:spcPts val="1000"/>
-              </a:spcAft>
+            <a:pPr lvl="0" marL="457200" indent="-228600">
+              <a:buFont typeface="Calibri"/>
+              <a:spcAft>
+                <a:spcPts val="1000"/>
+              </a:spcAft>
+              <a:buSzPct val="100000"/>
               <a:buChar char="•"/>
               <a:lnSpc>
                 <a:spcPts val="2200"/>
@@ -20917,10 +21267,12 @@
             </a:r>
           </a:p>
           <a:p>
-            <a:pPr>
-              <a:spcAft>
-                <a:spcPts val="1000"/>
-              </a:spcAft>
+            <a:pPr lvl="0" marL="457200" indent="-228600">
+              <a:buFont typeface="Calibri"/>
+              <a:spcAft>
+                <a:spcPts val="1000"/>
+              </a:spcAft>
+              <a:buSzPct val="100000"/>
               <a:buChar char="•"/>
               <a:lnSpc>
                 <a:spcPts val="2200"/>
@@ -20937,10 +21289,12 @@
             </a:r>
           </a:p>
           <a:p>
-            <a:pPr>
-              <a:spcAft>
-                <a:spcPts val="1000"/>
-              </a:spcAft>
+            <a:pPr lvl="0" marL="457200" indent="-228600">
+              <a:buFont typeface="Calibri"/>
+              <a:spcAft>
+                <a:spcPts val="1000"/>
+              </a:spcAft>
+              <a:buSzPct val="100000"/>
               <a:buChar char="•"/>
               <a:lnSpc>
                 <a:spcPts val="2200"/>
@@ -21076,10 +21430,12 @@
           </a:bodyPr>
           <a:lstStyle/>
           <a:p>
-            <a:pPr>
-              <a:spcAft>
-                <a:spcPts val="1000"/>
-              </a:spcAft>
+            <a:pPr lvl="0" marL="457200" indent="-228600">
+              <a:buFont typeface="Calibri"/>
+              <a:spcAft>
+                <a:spcPts val="1000"/>
+              </a:spcAft>
+              <a:buSzPct val="100000"/>
               <a:buChar char="•"/>
               <a:lnSpc>
                 <a:spcPts val="2200"/>
@@ -21096,10 +21452,12 @@
             </a:r>
           </a:p>
           <a:p>
-            <a:pPr>
-              <a:spcAft>
-                <a:spcPts val="1000"/>
-              </a:spcAft>
+            <a:pPr lvl="0" marL="457200" indent="-228600">
+              <a:buFont typeface="Calibri"/>
+              <a:spcAft>
+                <a:spcPts val="1000"/>
+              </a:spcAft>
+              <a:buSzPct val="100000"/>
               <a:buChar char="•"/>
               <a:lnSpc>
                 <a:spcPts val="2200"/>
@@ -21116,10 +21474,12 @@
             </a:r>
           </a:p>
           <a:p>
-            <a:pPr>
-              <a:spcAft>
-                <a:spcPts val="1000"/>
-              </a:spcAft>
+            <a:pPr lvl="0" marL="457200" indent="-228600">
+              <a:buFont typeface="Calibri"/>
+              <a:spcAft>
+                <a:spcPts val="1000"/>
+              </a:spcAft>
+              <a:buSzPct val="100000"/>
               <a:buChar char="•"/>
               <a:lnSpc>
                 <a:spcPts val="2200"/>
@@ -21255,10 +21615,12 @@
           </a:bodyPr>
           <a:lstStyle/>
           <a:p>
-            <a:pPr>
-              <a:spcAft>
-                <a:spcPts val="1000"/>
-              </a:spcAft>
+            <a:pPr lvl="0" marL="457200" indent="-228600">
+              <a:buFont typeface="Calibri"/>
+              <a:spcAft>
+                <a:spcPts val="1000"/>
+              </a:spcAft>
+              <a:buSzPct val="100000"/>
               <a:buChar char="•"/>
               <a:lnSpc>
                 <a:spcPts val="2200"/>
@@ -21275,10 +21637,12 @@
             </a:r>
           </a:p>
           <a:p>
-            <a:pPr>
-              <a:spcAft>
-                <a:spcPts val="1000"/>
-              </a:spcAft>
+            <a:pPr lvl="0" marL="457200" indent="-228600">
+              <a:buFont typeface="Calibri"/>
+              <a:spcAft>
+                <a:spcPts val="1000"/>
+              </a:spcAft>
+              <a:buSzPct val="100000"/>
               <a:buChar char="•"/>
               <a:lnSpc>
                 <a:spcPts val="2200"/>
@@ -21295,10 +21659,12 @@
             </a:r>
           </a:p>
           <a:p>
-            <a:pPr>
-              <a:spcAft>
-                <a:spcPts val="1000"/>
-              </a:spcAft>
+            <a:pPr lvl="0" marL="457200" indent="-228600">
+              <a:buFont typeface="Calibri"/>
+              <a:spcAft>
+                <a:spcPts val="1000"/>
+              </a:spcAft>
+              <a:buSzPct val="100000"/>
               <a:buChar char="•"/>
               <a:lnSpc>
                 <a:spcPts val="2200"/>
@@ -21434,10 +21800,12 @@
           </a:bodyPr>
           <a:lstStyle/>
           <a:p>
-            <a:pPr>
-              <a:spcAft>
-                <a:spcPts val="1000"/>
-              </a:spcAft>
+            <a:pPr lvl="0" marL="457200" indent="-228600">
+              <a:buFont typeface="Calibri"/>
+              <a:spcAft>
+                <a:spcPts val="1000"/>
+              </a:spcAft>
+              <a:buSzPct val="100000"/>
               <a:buChar char="•"/>
               <a:lnSpc>
                 <a:spcPts val="2200"/>
@@ -21454,10 +21822,12 @@
             </a:r>
           </a:p>
           <a:p>
-            <a:pPr>
-              <a:spcAft>
-                <a:spcPts val="1000"/>
-              </a:spcAft>
+            <a:pPr lvl="0" marL="457200" indent="-228600">
+              <a:buFont typeface="Calibri"/>
+              <a:spcAft>
+                <a:spcPts val="1000"/>
+              </a:spcAft>
+              <a:buSzPct val="100000"/>
               <a:buChar char="•"/>
               <a:lnSpc>
                 <a:spcPts val="2200"/>
@@ -21474,10 +21844,12 @@
             </a:r>
           </a:p>
           <a:p>
-            <a:pPr>
-              <a:spcAft>
-                <a:spcPts val="1000"/>
-              </a:spcAft>
+            <a:pPr lvl="0" marL="457200" indent="-228600">
+              <a:buFont typeface="Calibri"/>
+              <a:spcAft>
+                <a:spcPts val="1000"/>
+              </a:spcAft>
+              <a:buSzPct val="100000"/>
               <a:buChar char="•"/>
               <a:lnSpc>
                 <a:spcPts val="2200"/>
@@ -21494,10 +21866,12 @@
             </a:r>
           </a:p>
           <a:p>
-            <a:pPr>
-              <a:spcAft>
-                <a:spcPts val="1000"/>
-              </a:spcAft>
+            <a:pPr lvl="0" marL="457200" indent="-228600">
+              <a:buFont typeface="Calibri"/>
+              <a:spcAft>
+                <a:spcPts val="1000"/>
+              </a:spcAft>
+              <a:buSzPct val="100000"/>
               <a:buChar char="•"/>
               <a:lnSpc>
                 <a:spcPts val="2200"/>
@@ -21633,10 +22007,12 @@
           </a:bodyPr>
           <a:lstStyle/>
           <a:p>
-            <a:pPr>
-              <a:spcAft>
-                <a:spcPts val="1000"/>
-              </a:spcAft>
+            <a:pPr lvl="0" marL="457200" indent="-228600">
+              <a:buFont typeface="Calibri"/>
+              <a:spcAft>
+                <a:spcPts val="1000"/>
+              </a:spcAft>
+              <a:buSzPct val="100000"/>
               <a:buChar char="•"/>
               <a:lnSpc>
                 <a:spcPts val="2200"/>
@@ -21653,10 +22029,12 @@
             </a:r>
           </a:p>
           <a:p>
-            <a:pPr>
-              <a:spcAft>
-                <a:spcPts val="1000"/>
-              </a:spcAft>
+            <a:pPr lvl="0" marL="457200" indent="-228600">
+              <a:buFont typeface="Calibri"/>
+              <a:spcAft>
+                <a:spcPts val="1000"/>
+              </a:spcAft>
+              <a:buSzPct val="100000"/>
               <a:buChar char="•"/>
               <a:lnSpc>
                 <a:spcPts val="2200"/>
@@ -21673,10 +22051,12 @@
             </a:r>
           </a:p>
           <a:p>
-            <a:pPr>
-              <a:spcAft>
-                <a:spcPts val="1000"/>
-              </a:spcAft>
+            <a:pPr lvl="0" marL="457200" indent="-228600">
+              <a:buFont typeface="Calibri"/>
+              <a:spcAft>
+                <a:spcPts val="1000"/>
+              </a:spcAft>
+              <a:buSzPct val="100000"/>
               <a:buChar char="•"/>
               <a:lnSpc>
                 <a:spcPts val="2200"/>
@@ -21693,10 +22073,12 @@
             </a:r>
           </a:p>
           <a:p>
-            <a:pPr>
-              <a:spcAft>
-                <a:spcPts val="1000"/>
-              </a:spcAft>
+            <a:pPr lvl="0" marL="457200" indent="-228600">
+              <a:buFont typeface="Calibri"/>
+              <a:spcAft>
+                <a:spcPts val="1000"/>
+              </a:spcAft>
+              <a:buSzPct val="100000"/>
               <a:buChar char="•"/>
               <a:lnSpc>
                 <a:spcPts val="2200"/>
@@ -21713,10 +22095,12 @@
             </a:r>
           </a:p>
           <a:p>
-            <a:pPr>
-              <a:spcAft>
-                <a:spcPts val="1000"/>
-              </a:spcAft>
+            <a:pPr lvl="0" marL="457200" indent="-228600">
+              <a:buFont typeface="Calibri"/>
+              <a:spcAft>
+                <a:spcPts val="1000"/>
+              </a:spcAft>
+              <a:buSzPct val="100000"/>
               <a:buChar char="•"/>
               <a:lnSpc>
                 <a:spcPts val="2200"/>
@@ -21852,10 +22236,12 @@
           </a:bodyPr>
           <a:lstStyle/>
           <a:p>
-            <a:pPr>
-              <a:spcAft>
-                <a:spcPts val="1000"/>
-              </a:spcAft>
+            <a:pPr lvl="0" marL="457200" indent="-228600">
+              <a:buFont typeface="Calibri"/>
+              <a:spcAft>
+                <a:spcPts val="1000"/>
+              </a:spcAft>
+              <a:buSzPct val="100000"/>
               <a:buChar char="•"/>
               <a:lnSpc>
                 <a:spcPts val="2200"/>
@@ -21872,10 +22258,12 @@
             </a:r>
           </a:p>
           <a:p>
-            <a:pPr>
-              <a:spcAft>
-                <a:spcPts val="1000"/>
-              </a:spcAft>
+            <a:pPr lvl="0" marL="457200" indent="-228600">
+              <a:buFont typeface="Calibri"/>
+              <a:spcAft>
+                <a:spcPts val="1000"/>
+              </a:spcAft>
+              <a:buSzPct val="100000"/>
               <a:buChar char="•"/>
               <a:lnSpc>
                 <a:spcPts val="2200"/>
@@ -21892,10 +22280,12 @@
             </a:r>
           </a:p>
           <a:p>
-            <a:pPr>
-              <a:spcAft>
-                <a:spcPts val="1000"/>
-              </a:spcAft>
+            <a:pPr lvl="0" marL="457200" indent="-228600">
+              <a:buFont typeface="Calibri"/>
+              <a:spcAft>
+                <a:spcPts val="1000"/>
+              </a:spcAft>
+              <a:buSzPct val="100000"/>
               <a:buChar char="•"/>
               <a:lnSpc>
                 <a:spcPts val="2200"/>
@@ -22031,10 +22421,12 @@
           </a:bodyPr>
           <a:lstStyle/>
           <a:p>
-            <a:pPr>
-              <a:spcAft>
-                <a:spcPts val="1000"/>
-              </a:spcAft>
+            <a:pPr lvl="0" marL="457200" indent="-228600">
+              <a:buFont typeface="Calibri"/>
+              <a:spcAft>
+                <a:spcPts val="1000"/>
+              </a:spcAft>
+              <a:buSzPct val="100000"/>
               <a:buChar char="•"/>
               <a:lnSpc>
                 <a:spcPts val="2200"/>
@@ -22051,10 +22443,12 @@
             </a:r>
           </a:p>
           <a:p>
-            <a:pPr>
-              <a:spcAft>
-                <a:spcPts val="1000"/>
-              </a:spcAft>
+            <a:pPr lvl="0" marL="457200" indent="-228600">
+              <a:buFont typeface="Calibri"/>
+              <a:spcAft>
+                <a:spcPts val="1000"/>
+              </a:spcAft>
+              <a:buSzPct val="100000"/>
               <a:buChar char="•"/>
               <a:lnSpc>
                 <a:spcPts val="2200"/>
@@ -22190,10 +22584,12 @@
           </a:bodyPr>
           <a:lstStyle/>
           <a:p>
-            <a:pPr>
-              <a:spcAft>
-                <a:spcPts val="1000"/>
-              </a:spcAft>
+            <a:pPr lvl="0" marL="457200" indent="-228600">
+              <a:buFont typeface="Calibri"/>
+              <a:spcAft>
+                <a:spcPts val="1000"/>
+              </a:spcAft>
+              <a:buSzPct val="100000"/>
               <a:buChar char="•"/>
               <a:lnSpc>
                 <a:spcPts val="2200"/>
@@ -22329,10 +22725,12 @@
           </a:bodyPr>
           <a:lstStyle/>
           <a:p>
-            <a:pPr>
-              <a:spcAft>
-                <a:spcPts val="1000"/>
-              </a:spcAft>
+            <a:pPr lvl="0" marL="457200" indent="-228600">
+              <a:buFont typeface="Calibri"/>
+              <a:spcAft>
+                <a:spcPts val="1000"/>
+              </a:spcAft>
+              <a:buSzPct val="100000"/>
               <a:buChar char="•"/>
               <a:lnSpc>
                 <a:spcPts val="2200"/>
@@ -22349,10 +22747,12 @@
             </a:r>
           </a:p>
           <a:p>
-            <a:pPr>
-              <a:spcAft>
-                <a:spcPts val="1000"/>
-              </a:spcAft>
+            <a:pPr lvl="0" marL="457200" indent="-228600">
+              <a:buFont typeface="Calibri"/>
+              <a:spcAft>
+                <a:spcPts val="1000"/>
+              </a:spcAft>
+              <a:buSzPct val="100000"/>
               <a:buChar char="•"/>
               <a:lnSpc>
                 <a:spcPts val="2200"/>
@@ -22369,10 +22769,12 @@
             </a:r>
           </a:p>
           <a:p>
-            <a:pPr>
-              <a:spcAft>
-                <a:spcPts val="1000"/>
-              </a:spcAft>
+            <a:pPr lvl="0" marL="457200" indent="-228600">
+              <a:buFont typeface="Calibri"/>
+              <a:spcAft>
+                <a:spcPts val="1000"/>
+              </a:spcAft>
+              <a:buSzPct val="100000"/>
               <a:buChar char="•"/>
               <a:lnSpc>
                 <a:spcPts val="2200"/>
@@ -22508,10 +22910,12 @@
           </a:bodyPr>
           <a:lstStyle/>
           <a:p>
-            <a:pPr>
-              <a:spcAft>
-                <a:spcPts val="1000"/>
-              </a:spcAft>
+            <a:pPr lvl="0" marL="457200" indent="-228600">
+              <a:buFont typeface="Calibri"/>
+              <a:spcAft>
+                <a:spcPts val="1000"/>
+              </a:spcAft>
+              <a:buSzPct val="100000"/>
               <a:buChar char="•"/>
               <a:lnSpc>
                 <a:spcPts val="2200"/>
@@ -22528,10 +22932,12 @@
             </a:r>
           </a:p>
           <a:p>
-            <a:pPr>
-              <a:spcAft>
-                <a:spcPts val="1000"/>
-              </a:spcAft>
+            <a:pPr lvl="0" marL="457200" indent="-228600">
+              <a:buFont typeface="Calibri"/>
+              <a:spcAft>
+                <a:spcPts val="1000"/>
+              </a:spcAft>
+              <a:buSzPct val="100000"/>
               <a:buChar char="•"/>
               <a:lnSpc>
                 <a:spcPts val="2200"/>
@@ -22548,10 +22954,12 @@
             </a:r>
           </a:p>
           <a:p>
-            <a:pPr>
-              <a:spcAft>
-                <a:spcPts val="1000"/>
-              </a:spcAft>
+            <a:pPr lvl="0" marL="457200" indent="-228600">
+              <a:buFont typeface="Calibri"/>
+              <a:spcAft>
+                <a:spcPts val="1000"/>
+              </a:spcAft>
+              <a:buSzPct val="100000"/>
               <a:buChar char="•"/>
               <a:lnSpc>
                 <a:spcPts val="2200"/>
@@ -22687,10 +23095,12 @@
           </a:bodyPr>
           <a:lstStyle/>
           <a:p>
-            <a:pPr>
-              <a:spcAft>
-                <a:spcPts val="1000"/>
-              </a:spcAft>
+            <a:pPr lvl="0" marL="457200" indent="-228600">
+              <a:buFont typeface="Calibri"/>
+              <a:spcAft>
+                <a:spcPts val="1000"/>
+              </a:spcAft>
+              <a:buSzPct val="100000"/>
               <a:buChar char="•"/>
               <a:lnSpc>
                 <a:spcPts val="2200"/>
@@ -22707,10 +23117,12 @@
             </a:r>
           </a:p>
           <a:p>
-            <a:pPr>
-              <a:spcAft>
-                <a:spcPts val="1000"/>
-              </a:spcAft>
+            <a:pPr lvl="0" marL="457200" indent="-228600">
+              <a:buFont typeface="Calibri"/>
+              <a:spcAft>
+                <a:spcPts val="1000"/>
+              </a:spcAft>
+              <a:buSzPct val="100000"/>
               <a:buChar char="•"/>
               <a:lnSpc>
                 <a:spcPts val="2200"/>
@@ -22727,10 +23139,12 @@
             </a:r>
           </a:p>
           <a:p>
-            <a:pPr>
-              <a:spcAft>
-                <a:spcPts val="1000"/>
-              </a:spcAft>
+            <a:pPr lvl="0" marL="457200" indent="-228600">
+              <a:buFont typeface="Calibri"/>
+              <a:spcAft>
+                <a:spcPts val="1000"/>
+              </a:spcAft>
+              <a:buSzPct val="100000"/>
               <a:buChar char="•"/>
               <a:lnSpc>
                 <a:spcPts val="2200"/>
@@ -22866,10 +23280,12 @@
           </a:bodyPr>
           <a:lstStyle/>
           <a:p>
-            <a:pPr>
-              <a:spcAft>
-                <a:spcPts val="1000"/>
-              </a:spcAft>
+            <a:pPr lvl="0" marL="457200" indent="-228600">
+              <a:buFont typeface="Calibri"/>
+              <a:spcAft>
+                <a:spcPts val="1000"/>
+              </a:spcAft>
+              <a:buSzPct val="100000"/>
               <a:buChar char="•"/>
               <a:lnSpc>
                 <a:spcPts val="2200"/>
@@ -22886,10 +23302,12 @@
             </a:r>
           </a:p>
           <a:p>
-            <a:pPr>
-              <a:spcAft>
-                <a:spcPts val="1000"/>
-              </a:spcAft>
+            <a:pPr lvl="0" marL="457200" indent="-228600">
+              <a:buFont typeface="Calibri"/>
+              <a:spcAft>
+                <a:spcPts val="1000"/>
+              </a:spcAft>
+              <a:buSzPct val="100000"/>
               <a:buChar char="•"/>
               <a:lnSpc>
                 <a:spcPts val="2200"/>
@@ -22906,10 +23324,12 @@
             </a:r>
           </a:p>
           <a:p>
-            <a:pPr>
-              <a:spcAft>
-                <a:spcPts val="1000"/>
-              </a:spcAft>
+            <a:pPr lvl="0" marL="457200" indent="-228600">
+              <a:buFont typeface="Calibri"/>
+              <a:spcAft>
+                <a:spcPts val="1000"/>
+              </a:spcAft>
+              <a:buSzPct val="100000"/>
               <a:buChar char="•"/>
               <a:lnSpc>
                 <a:spcPts val="2200"/>
@@ -23045,10 +23465,12 @@
           </a:bodyPr>
           <a:lstStyle/>
           <a:p>
-            <a:pPr>
-              <a:spcAft>
-                <a:spcPts val="1000"/>
-              </a:spcAft>
+            <a:pPr lvl="0" marL="457200" indent="-228600">
+              <a:buFont typeface="Calibri"/>
+              <a:spcAft>
+                <a:spcPts val="1000"/>
+              </a:spcAft>
+              <a:buSzPct val="100000"/>
               <a:buChar char="•"/>
               <a:lnSpc>
                 <a:spcPts val="2200"/>
@@ -23065,10 +23487,12 @@
             </a:r>
           </a:p>
           <a:p>
-            <a:pPr>
-              <a:spcAft>
-                <a:spcPts val="1000"/>
-              </a:spcAft>
+            <a:pPr lvl="0" marL="457200" indent="-228600">
+              <a:buFont typeface="Calibri"/>
+              <a:spcAft>
+                <a:spcPts val="1000"/>
+              </a:spcAft>
+              <a:buSzPct val="100000"/>
               <a:buChar char="•"/>
               <a:lnSpc>
                 <a:spcPts val="2200"/>
@@ -23085,10 +23509,12 @@
             </a:r>
           </a:p>
           <a:p>
-            <a:pPr>
-              <a:spcAft>
-                <a:spcPts val="1000"/>
-              </a:spcAft>
+            <a:pPr lvl="0" marL="457200" indent="-228600">
+              <a:buFont typeface="Calibri"/>
+              <a:spcAft>
+                <a:spcPts val="1000"/>
+              </a:spcAft>
+              <a:buSzPct val="100000"/>
               <a:buChar char="•"/>
               <a:lnSpc>
                 <a:spcPts val="2200"/>
@@ -23224,10 +23650,12 @@
           </a:bodyPr>
           <a:lstStyle/>
           <a:p>
-            <a:pPr>
-              <a:spcAft>
-                <a:spcPts val="1000"/>
-              </a:spcAft>
+            <a:pPr lvl="0" marL="457200" indent="-228600">
+              <a:buFont typeface="Calibri"/>
+              <a:spcAft>
+                <a:spcPts val="1000"/>
+              </a:spcAft>
+              <a:buSzPct val="100000"/>
               <a:buChar char="•"/>
               <a:lnSpc>
                 <a:spcPts val="2200"/>
@@ -23244,10 +23672,12 @@
             </a:r>
           </a:p>
           <a:p>
-            <a:pPr>
-              <a:spcAft>
-                <a:spcPts val="1000"/>
-              </a:spcAft>
+            <a:pPr lvl="0" marL="457200" indent="-228600">
+              <a:buFont typeface="Calibri"/>
+              <a:spcAft>
+                <a:spcPts val="1000"/>
+              </a:spcAft>
+              <a:buSzPct val="100000"/>
               <a:buChar char="•"/>
               <a:lnSpc>
                 <a:spcPts val="2200"/>
@@ -23264,10 +23694,12 @@
             </a:r>
           </a:p>
           <a:p>
-            <a:pPr>
-              <a:spcAft>
-                <a:spcPts val="1000"/>
-              </a:spcAft>
+            <a:pPr lvl="0" marL="457200" indent="-228600">
+              <a:buFont typeface="Calibri"/>
+              <a:spcAft>
+                <a:spcPts val="1000"/>
+              </a:spcAft>
+              <a:buSzPct val="100000"/>
               <a:buChar char="•"/>
               <a:lnSpc>
                 <a:spcPts val="2200"/>
@@ -23403,10 +23835,12 @@
           </a:bodyPr>
           <a:lstStyle/>
           <a:p>
-            <a:pPr>
-              <a:spcAft>
-                <a:spcPts val="1000"/>
-              </a:spcAft>
+            <a:pPr lvl="0" marL="457200" indent="-228600">
+              <a:buFont typeface="Calibri"/>
+              <a:spcAft>
+                <a:spcPts val="1000"/>
+              </a:spcAft>
+              <a:buSzPct val="100000"/>
               <a:buChar char="•"/>
               <a:lnSpc>
                 <a:spcPts val="2200"/>
@@ -23423,10 +23857,12 @@
             </a:r>
           </a:p>
           <a:p>
-            <a:pPr>
-              <a:spcAft>
-                <a:spcPts val="1000"/>
-              </a:spcAft>
+            <a:pPr lvl="0" marL="457200" indent="-228600">
+              <a:buFont typeface="Calibri"/>
+              <a:spcAft>
+                <a:spcPts val="1000"/>
+              </a:spcAft>
+              <a:buSzPct val="100000"/>
               <a:buChar char="•"/>
               <a:lnSpc>
                 <a:spcPts val="2200"/>
@@ -23443,10 +23879,12 @@
             </a:r>
           </a:p>
           <a:p>
-            <a:pPr>
-              <a:spcAft>
-                <a:spcPts val="1000"/>
-              </a:spcAft>
+            <a:pPr lvl="0" marL="457200" indent="-228600">
+              <a:buFont typeface="Calibri"/>
+              <a:spcAft>
+                <a:spcPts val="1000"/>
+              </a:spcAft>
+              <a:buSzPct val="100000"/>
               <a:buChar char="•"/>
               <a:lnSpc>
                 <a:spcPts val="2200"/>
@@ -23582,10 +24020,12 @@
           </a:bodyPr>
           <a:lstStyle/>
           <a:p>
-            <a:pPr>
-              <a:spcAft>
-                <a:spcPts val="1000"/>
-              </a:spcAft>
+            <a:pPr lvl="0" marL="457200" indent="-228600">
+              <a:buFont typeface="Calibri"/>
+              <a:spcAft>
+                <a:spcPts val="1000"/>
+              </a:spcAft>
+              <a:buSzPct val="100000"/>
               <a:buChar char="•"/>
               <a:lnSpc>
                 <a:spcPts val="2200"/>
@@ -23602,10 +24042,12 @@
             </a:r>
           </a:p>
           <a:p>
-            <a:pPr>
-              <a:spcAft>
-                <a:spcPts val="1000"/>
-              </a:spcAft>
+            <a:pPr lvl="0" marL="457200" indent="-228600">
+              <a:buFont typeface="Calibri"/>
+              <a:spcAft>
+                <a:spcPts val="1000"/>
+              </a:spcAft>
+              <a:buSzPct val="100000"/>
               <a:buChar char="•"/>
               <a:lnSpc>
                 <a:spcPts val="2200"/>
@@ -23622,10 +24064,12 @@
             </a:r>
           </a:p>
           <a:p>
-            <a:pPr>
-              <a:spcAft>
-                <a:spcPts val="1000"/>
-              </a:spcAft>
+            <a:pPr lvl="0" marL="457200" indent="-228600">
+              <a:buFont typeface="Calibri"/>
+              <a:spcAft>
+                <a:spcPts val="1000"/>
+              </a:spcAft>
+              <a:buSzPct val="100000"/>
               <a:buChar char="•"/>
               <a:lnSpc>
                 <a:spcPts val="2200"/>
@@ -23642,10 +24086,12 @@
             </a:r>
           </a:p>
           <a:p>
-            <a:pPr>
-              <a:spcAft>
-                <a:spcPts val="1000"/>
-              </a:spcAft>
+            <a:pPr lvl="0" marL="457200" indent="-228600">
+              <a:buFont typeface="Calibri"/>
+              <a:spcAft>
+                <a:spcPts val="1000"/>
+              </a:spcAft>
+              <a:buSzPct val="100000"/>
               <a:buChar char="•"/>
               <a:lnSpc>
                 <a:spcPts val="2200"/>
@@ -23662,10 +24108,12 @@
             </a:r>
           </a:p>
           <a:p>
-            <a:pPr>
-              <a:spcAft>
-                <a:spcPts val="1000"/>
-              </a:spcAft>
+            <a:pPr lvl="0" marL="457200" indent="-228600">
+              <a:buFont typeface="Calibri"/>
+              <a:spcAft>
+                <a:spcPts val="1000"/>
+              </a:spcAft>
+              <a:buSzPct val="100000"/>
               <a:buChar char="•"/>
               <a:lnSpc>
                 <a:spcPts val="2200"/>
@@ -23801,10 +24249,12 @@
           </a:bodyPr>
           <a:lstStyle/>
           <a:p>
-            <a:pPr>
-              <a:spcAft>
-                <a:spcPts val="1000"/>
-              </a:spcAft>
+            <a:pPr lvl="0" marL="457200" indent="-228600">
+              <a:buFont typeface="Calibri"/>
+              <a:spcAft>
+                <a:spcPts val="1000"/>
+              </a:spcAft>
+              <a:buSzPct val="100000"/>
               <a:buChar char="•"/>
               <a:lnSpc>
                 <a:spcPts val="2200"/>
@@ -23821,10 +24271,12 @@
             </a:r>
           </a:p>
           <a:p>
-            <a:pPr>
-              <a:spcAft>
-                <a:spcPts val="1000"/>
-              </a:spcAft>
+            <a:pPr lvl="0" marL="457200" indent="-228600">
+              <a:buFont typeface="Calibri"/>
+              <a:spcAft>
+                <a:spcPts val="1000"/>
+              </a:spcAft>
+              <a:buSzPct val="100000"/>
               <a:buChar char="•"/>
               <a:lnSpc>
                 <a:spcPts val="2200"/>
@@ -23841,10 +24293,12 @@
             </a:r>
           </a:p>
           <a:p>
-            <a:pPr>
-              <a:spcAft>
-                <a:spcPts val="1000"/>
-              </a:spcAft>
+            <a:pPr lvl="0" marL="457200" indent="-228600">
+              <a:buFont typeface="Calibri"/>
+              <a:spcAft>
+                <a:spcPts val="1000"/>
+              </a:spcAft>
+              <a:buSzPct val="100000"/>
               <a:buChar char="•"/>
               <a:lnSpc>
                 <a:spcPts val="2200"/>
@@ -23980,10 +24434,12 @@
           </a:bodyPr>
           <a:lstStyle/>
           <a:p>
-            <a:pPr>
-              <a:spcAft>
-                <a:spcPts val="1000"/>
-              </a:spcAft>
+            <a:pPr lvl="0" marL="457200" indent="-228600">
+              <a:buFont typeface="Calibri"/>
+              <a:spcAft>
+                <a:spcPts val="1000"/>
+              </a:spcAft>
+              <a:buSzPct val="100000"/>
               <a:buChar char="•"/>
               <a:lnSpc>
                 <a:spcPts val="2200"/>
@@ -24000,10 +24456,12 @@
             </a:r>
           </a:p>
           <a:p>
-            <a:pPr>
-              <a:spcAft>
-                <a:spcPts val="1000"/>
-              </a:spcAft>
+            <a:pPr lvl="0" marL="457200" indent="-228600">
+              <a:buFont typeface="Calibri"/>
+              <a:spcAft>
+                <a:spcPts val="1000"/>
+              </a:spcAft>
+              <a:buSzPct val="100000"/>
               <a:buChar char="•"/>
               <a:lnSpc>
                 <a:spcPts val="2200"/>
@@ -24139,10 +24597,12 @@
           </a:bodyPr>
           <a:lstStyle/>
           <a:p>
-            <a:pPr>
-              <a:spcAft>
-                <a:spcPts val="1000"/>
-              </a:spcAft>
+            <a:pPr lvl="0" marL="457200" indent="-228600">
+              <a:buFont typeface="Calibri"/>
+              <a:spcAft>
+                <a:spcPts val="1000"/>
+              </a:spcAft>
+              <a:buSzPct val="100000"/>
               <a:buChar char="•"/>
               <a:lnSpc>
                 <a:spcPts val="2200"/>
@@ -24278,10 +24738,12 @@
           </a:bodyPr>
           <a:lstStyle/>
           <a:p>
-            <a:pPr>
-              <a:spcAft>
-                <a:spcPts val="1000"/>
-              </a:spcAft>
+            <a:pPr lvl="0" marL="457200" indent="-228600">
+              <a:buFont typeface="Calibri"/>
+              <a:spcAft>
+                <a:spcPts val="1000"/>
+              </a:spcAft>
+              <a:buSzPct val="100000"/>
               <a:buChar char="•"/>
               <a:lnSpc>
                 <a:spcPts val="2200"/>
@@ -24298,10 +24760,12 @@
             </a:r>
           </a:p>
           <a:p>
-            <a:pPr>
-              <a:spcAft>
-                <a:spcPts val="1000"/>
-              </a:spcAft>
+            <a:pPr lvl="0" marL="457200" indent="-228600">
+              <a:buFont typeface="Calibri"/>
+              <a:spcAft>
+                <a:spcPts val="1000"/>
+              </a:spcAft>
+              <a:buSzPct val="100000"/>
               <a:buChar char="•"/>
               <a:lnSpc>
                 <a:spcPts val="2200"/>
@@ -24318,10 +24782,12 @@
             </a:r>
           </a:p>
           <a:p>
-            <a:pPr>
-              <a:spcAft>
-                <a:spcPts val="1000"/>
-              </a:spcAft>
+            <a:pPr lvl="0" marL="457200" indent="-228600">
+              <a:buFont typeface="Calibri"/>
+              <a:spcAft>
+                <a:spcPts val="1000"/>
+              </a:spcAft>
+              <a:buSzPct val="100000"/>
               <a:buChar char="•"/>
               <a:lnSpc>
                 <a:spcPts val="2200"/>
@@ -24457,10 +24923,12 @@
           </a:bodyPr>
           <a:lstStyle/>
           <a:p>
-            <a:pPr>
-              <a:spcAft>
-                <a:spcPts val="1000"/>
-              </a:spcAft>
+            <a:pPr lvl="0" marL="457200" indent="-228600">
+              <a:buFont typeface="Calibri"/>
+              <a:spcAft>
+                <a:spcPts val="1000"/>
+              </a:spcAft>
+              <a:buSzPct val="100000"/>
               <a:buChar char="•"/>
               <a:lnSpc>
                 <a:spcPts val="2200"/>
@@ -24477,10 +24945,12 @@
             </a:r>
           </a:p>
           <a:p>
-            <a:pPr>
-              <a:spcAft>
-                <a:spcPts val="1000"/>
-              </a:spcAft>
+            <a:pPr lvl="0" marL="457200" indent="-228600">
+              <a:buFont typeface="Calibri"/>
+              <a:spcAft>
+                <a:spcPts val="1000"/>
+              </a:spcAft>
+              <a:buSzPct val="100000"/>
               <a:buChar char="•"/>
               <a:lnSpc>
                 <a:spcPts val="2200"/>
@@ -24497,10 +24967,12 @@
             </a:r>
           </a:p>
           <a:p>
-            <a:pPr>
-              <a:spcAft>
-                <a:spcPts val="1000"/>
-              </a:spcAft>
+            <a:pPr lvl="0" marL="457200" indent="-228600">
+              <a:buFont typeface="Calibri"/>
+              <a:spcAft>
+                <a:spcPts val="1000"/>
+              </a:spcAft>
+              <a:buSzPct val="100000"/>
               <a:buChar char="•"/>
               <a:lnSpc>
                 <a:spcPts val="2200"/>
@@ -24636,10 +25108,12 @@
           </a:bodyPr>
           <a:lstStyle/>
           <a:p>
-            <a:pPr>
-              <a:spcAft>
-                <a:spcPts val="1000"/>
-              </a:spcAft>
+            <a:pPr lvl="0" marL="457200" indent="-228600">
+              <a:buFont typeface="Calibri"/>
+              <a:spcAft>
+                <a:spcPts val="1000"/>
+              </a:spcAft>
+              <a:buSzPct val="100000"/>
               <a:buChar char="•"/>
               <a:lnSpc>
                 <a:spcPts val="2200"/>
@@ -24656,10 +25130,12 @@
             </a:r>
           </a:p>
           <a:p>
-            <a:pPr>
-              <a:spcAft>
-                <a:spcPts val="1000"/>
-              </a:spcAft>
+            <a:pPr lvl="0" marL="457200" indent="-228600">
+              <a:buFont typeface="Calibri"/>
+              <a:spcAft>
+                <a:spcPts val="1000"/>
+              </a:spcAft>
+              <a:buSzPct val="100000"/>
               <a:buChar char="•"/>
               <a:lnSpc>
                 <a:spcPts val="2200"/>
@@ -24676,10 +25152,12 @@
             </a:r>
           </a:p>
           <a:p>
-            <a:pPr>
-              <a:spcAft>
-                <a:spcPts val="1000"/>
-              </a:spcAft>
+            <a:pPr lvl="0" marL="457200" indent="-228600">
+              <a:buFont typeface="Calibri"/>
+              <a:spcAft>
+                <a:spcPts val="1000"/>
+              </a:spcAft>
+              <a:buSzPct val="100000"/>
               <a:buChar char="•"/>
               <a:lnSpc>
                 <a:spcPts val="2200"/>
@@ -24815,10 +25293,12 @@
           </a:bodyPr>
           <a:lstStyle/>
           <a:p>
-            <a:pPr>
-              <a:spcAft>
-                <a:spcPts val="1000"/>
-              </a:spcAft>
+            <a:pPr lvl="0" marL="457200" indent="-228600">
+              <a:buFont typeface="Calibri"/>
+              <a:spcAft>
+                <a:spcPts val="1000"/>
+              </a:spcAft>
+              <a:buSzPct val="100000"/>
               <a:buChar char="•"/>
               <a:lnSpc>
                 <a:spcPts val="2200"/>
@@ -24835,10 +25315,12 @@
             </a:r>
           </a:p>
           <a:p>
-            <a:pPr>
-              <a:spcAft>
-                <a:spcPts val="1000"/>
-              </a:spcAft>
+            <a:pPr lvl="0" marL="457200" indent="-228600">
+              <a:buFont typeface="Calibri"/>
+              <a:spcAft>
+                <a:spcPts val="1000"/>
+              </a:spcAft>
+              <a:buSzPct val="100000"/>
               <a:buChar char="•"/>
               <a:lnSpc>
                 <a:spcPts val="2200"/>
@@ -24855,10 +25337,12 @@
             </a:r>
           </a:p>
           <a:p>
-            <a:pPr>
-              <a:spcAft>
-                <a:spcPts val="1000"/>
-              </a:spcAft>
+            <a:pPr lvl="0" marL="457200" indent="-228600">
+              <a:buFont typeface="Calibri"/>
+              <a:spcAft>
+                <a:spcPts val="1000"/>
+              </a:spcAft>
+              <a:buSzPct val="100000"/>
               <a:buChar char="•"/>
               <a:lnSpc>
                 <a:spcPts val="2200"/>
@@ -24994,10 +25478,12 @@
           </a:bodyPr>
           <a:lstStyle/>
           <a:p>
-            <a:pPr>
-              <a:spcAft>
-                <a:spcPts val="1000"/>
-              </a:spcAft>
+            <a:pPr lvl="0" marL="457200" indent="-228600">
+              <a:buFont typeface="Calibri"/>
+              <a:spcAft>
+                <a:spcPts val="1000"/>
+              </a:spcAft>
+              <a:buSzPct val="100000"/>
               <a:buChar char="•"/>
               <a:lnSpc>
                 <a:spcPts val="2200"/>
@@ -25014,10 +25500,12 @@
             </a:r>
           </a:p>
           <a:p>
-            <a:pPr>
-              <a:spcAft>
-                <a:spcPts val="1000"/>
-              </a:spcAft>
+            <a:pPr lvl="0" marL="457200" indent="-228600">
+              <a:buFont typeface="Calibri"/>
+              <a:spcAft>
+                <a:spcPts val="1000"/>
+              </a:spcAft>
+              <a:buSzPct val="100000"/>
               <a:buChar char="•"/>
               <a:lnSpc>
                 <a:spcPts val="2200"/>
@@ -25034,10 +25522,12 @@
             </a:r>
           </a:p>
           <a:p>
-            <a:pPr>
-              <a:spcAft>
-                <a:spcPts val="1000"/>
-              </a:spcAft>
+            <a:pPr lvl="0" marL="457200" indent="-228600">
+              <a:buFont typeface="Calibri"/>
+              <a:spcAft>
+                <a:spcPts val="1000"/>
+              </a:spcAft>
+              <a:buSzPct val="100000"/>
               <a:buChar char="•"/>
               <a:lnSpc>
                 <a:spcPts val="2200"/>
@@ -25173,10 +25663,12 @@
           </a:bodyPr>
           <a:lstStyle/>
           <a:p>
-            <a:pPr>
-              <a:spcAft>
-                <a:spcPts val="1000"/>
-              </a:spcAft>
+            <a:pPr lvl="0" marL="457200" indent="-228600">
+              <a:buFont typeface="Calibri"/>
+              <a:spcAft>
+                <a:spcPts val="1000"/>
+              </a:spcAft>
+              <a:buSzPct val="100000"/>
               <a:buChar char="•"/>
               <a:lnSpc>
                 <a:spcPts val="2200"/>
@@ -25193,10 +25685,12 @@
             </a:r>
           </a:p>
           <a:p>
-            <a:pPr>
-              <a:spcAft>
-                <a:spcPts val="1000"/>
-              </a:spcAft>
+            <a:pPr lvl="0" marL="457200" indent="-228600">
+              <a:buFont typeface="Calibri"/>
+              <a:spcAft>
+                <a:spcPts val="1000"/>
+              </a:spcAft>
+              <a:buSzPct val="100000"/>
               <a:buChar char="•"/>
               <a:lnSpc>
                 <a:spcPts val="2200"/>
@@ -25213,10 +25707,12 @@
             </a:r>
           </a:p>
           <a:p>
-            <a:pPr>
-              <a:spcAft>
-                <a:spcPts val="1000"/>
-              </a:spcAft>
+            <a:pPr lvl="0" marL="457200" indent="-228600">
+              <a:buFont typeface="Calibri"/>
+              <a:spcAft>
+                <a:spcPts val="1000"/>
+              </a:spcAft>
+              <a:buSzPct val="100000"/>
               <a:buChar char="•"/>
               <a:lnSpc>
                 <a:spcPts val="2200"/>
@@ -25352,10 +25848,12 @@
           </a:bodyPr>
           <a:lstStyle/>
           <a:p>
-            <a:pPr>
-              <a:spcAft>
-                <a:spcPts val="1000"/>
-              </a:spcAft>
+            <a:pPr lvl="0" marL="457200" indent="-228600">
+              <a:buFont typeface="Calibri"/>
+              <a:spcAft>
+                <a:spcPts val="1000"/>
+              </a:spcAft>
+              <a:buSzPct val="100000"/>
               <a:buChar char="•"/>
               <a:lnSpc>
                 <a:spcPts val="2200"/>
@@ -25372,10 +25870,12 @@
             </a:r>
           </a:p>
           <a:p>
-            <a:pPr>
-              <a:spcAft>
-                <a:spcPts val="1000"/>
-              </a:spcAft>
+            <a:pPr lvl="0" marL="457200" indent="-228600">
+              <a:buFont typeface="Calibri"/>
+              <a:spcAft>
+                <a:spcPts val="1000"/>
+              </a:spcAft>
+              <a:buSzPct val="100000"/>
               <a:buChar char="•"/>
               <a:lnSpc>
                 <a:spcPts val="2200"/>
@@ -25511,10 +26011,12 @@
           </a:bodyPr>
           <a:lstStyle/>
           <a:p>
-            <a:pPr>
-              <a:spcAft>
-                <a:spcPts val="1000"/>
-              </a:spcAft>
+            <a:pPr lvl="0" marL="457200" indent="-228600">
+              <a:buFont typeface="Calibri"/>
+              <a:spcAft>
+                <a:spcPts val="1000"/>
+              </a:spcAft>
+              <a:buSzPct val="100000"/>
               <a:buChar char="•"/>
               <a:lnSpc>
                 <a:spcPts val="2200"/>
@@ -25531,10 +26033,12 @@
             </a:r>
           </a:p>
           <a:p>
-            <a:pPr>
-              <a:spcAft>
-                <a:spcPts val="1000"/>
-              </a:spcAft>
+            <a:pPr lvl="0" marL="457200" indent="-228600">
+              <a:buFont typeface="Calibri"/>
+              <a:spcAft>
+                <a:spcPts val="1000"/>
+              </a:spcAft>
+              <a:buSzPct val="100000"/>
               <a:buChar char="•"/>
               <a:lnSpc>
                 <a:spcPts val="2200"/>
@@ -25551,10 +26055,12 @@
             </a:r>
           </a:p>
           <a:p>
-            <a:pPr>
-              <a:spcAft>
-                <a:spcPts val="1000"/>
-              </a:spcAft>
+            <a:pPr lvl="0" marL="457200" indent="-228600">
+              <a:buFont typeface="Calibri"/>
+              <a:spcAft>
+                <a:spcPts val="1000"/>
+              </a:spcAft>
+              <a:buSzPct val="100000"/>
               <a:buChar char="•"/>
               <a:lnSpc>
                 <a:spcPts val="2200"/>
@@ -25690,10 +26196,12 @@
           </a:bodyPr>
           <a:lstStyle/>
           <a:p>
-            <a:pPr>
-              <a:spcAft>
-                <a:spcPts val="1000"/>
-              </a:spcAft>
+            <a:pPr lvl="0" marL="457200" indent="-228600">
+              <a:buFont typeface="Calibri"/>
+              <a:spcAft>
+                <a:spcPts val="1000"/>
+              </a:spcAft>
+              <a:buSzPct val="100000"/>
               <a:buChar char="•"/>
               <a:lnSpc>
                 <a:spcPts val="2200"/>
@@ -25710,10 +26218,12 @@
             </a:r>
           </a:p>
           <a:p>
-            <a:pPr>
-              <a:spcAft>
-                <a:spcPts val="1000"/>
-              </a:spcAft>
+            <a:pPr lvl="0" marL="457200" indent="-228600">
+              <a:buFont typeface="Calibri"/>
+              <a:spcAft>
+                <a:spcPts val="1000"/>
+              </a:spcAft>
+              <a:buSzPct val="100000"/>
               <a:buChar char="•"/>
               <a:lnSpc>
                 <a:spcPts val="2200"/>
@@ -25730,10 +26240,12 @@
             </a:r>
           </a:p>
           <a:p>
-            <a:pPr>
-              <a:spcAft>
-                <a:spcPts val="1000"/>
-              </a:spcAft>
+            <a:pPr lvl="0" marL="457200" indent="-228600">
+              <a:buFont typeface="Calibri"/>
+              <a:spcAft>
+                <a:spcPts val="1000"/>
+              </a:spcAft>
+              <a:buSzPct val="100000"/>
               <a:buChar char="•"/>
               <a:lnSpc>
                 <a:spcPts val="2200"/>
@@ -25869,10 +26381,12 @@
           </a:bodyPr>
           <a:lstStyle/>
           <a:p>
-            <a:pPr>
-              <a:spcAft>
-                <a:spcPts val="1000"/>
-              </a:spcAft>
+            <a:pPr lvl="0" marL="457200" indent="-228600">
+              <a:buFont typeface="Calibri"/>
+              <a:spcAft>
+                <a:spcPts val="1000"/>
+              </a:spcAft>
+              <a:buSzPct val="100000"/>
               <a:buChar char="•"/>
               <a:lnSpc>
                 <a:spcPts val="2200"/>
@@ -25889,10 +26403,12 @@
             </a:r>
           </a:p>
           <a:p>
-            <a:pPr>
-              <a:spcAft>
-                <a:spcPts val="1000"/>
-              </a:spcAft>
+            <a:pPr lvl="0" marL="457200" indent="-228600">
+              <a:buFont typeface="Calibri"/>
+              <a:spcAft>
+                <a:spcPts val="1000"/>
+              </a:spcAft>
+              <a:buSzPct val="100000"/>
               <a:buChar char="•"/>
               <a:lnSpc>
                 <a:spcPts val="2200"/>
@@ -26028,10 +26544,12 @@
           </a:bodyPr>
           <a:lstStyle/>
           <a:p>
-            <a:pPr>
-              <a:spcAft>
-                <a:spcPts val="1000"/>
-              </a:spcAft>
+            <a:pPr lvl="0" marL="457200" indent="-228600">
+              <a:buFont typeface="Calibri"/>
+              <a:spcAft>
+                <a:spcPts val="1000"/>
+              </a:spcAft>
+              <a:buSzPct val="100000"/>
               <a:buChar char="•"/>
               <a:lnSpc>
                 <a:spcPts val="2200"/>
@@ -26167,10 +26685,12 @@
           </a:bodyPr>
           <a:lstStyle/>
           <a:p>
-            <a:pPr>
-              <a:spcAft>
-                <a:spcPts val="1000"/>
-              </a:spcAft>
+            <a:pPr lvl="0" marL="457200" indent="-228600">
+              <a:buFont typeface="Calibri"/>
+              <a:spcAft>
+                <a:spcPts val="1000"/>
+              </a:spcAft>
+              <a:buSzPct val="100000"/>
               <a:buChar char="•"/>
               <a:lnSpc>
                 <a:spcPts val="2200"/>
@@ -26187,10 +26707,12 @@
             </a:r>
           </a:p>
           <a:p>
-            <a:pPr>
-              <a:spcAft>
-                <a:spcPts val="1000"/>
-              </a:spcAft>
+            <a:pPr lvl="0" marL="457200" indent="-228600">
+              <a:buFont typeface="Calibri"/>
+              <a:spcAft>
+                <a:spcPts val="1000"/>
+              </a:spcAft>
+              <a:buSzPct val="100000"/>
               <a:buChar char="•"/>
               <a:lnSpc>
                 <a:spcPts val="2200"/>
@@ -26207,10 +26729,12 @@
             </a:r>
           </a:p>
           <a:p>
-            <a:pPr>
-              <a:spcAft>
-                <a:spcPts val="1000"/>
-              </a:spcAft>
+            <a:pPr lvl="0" marL="457200" indent="-228600">
+              <a:buFont typeface="Calibri"/>
+              <a:spcAft>
+                <a:spcPts val="1000"/>
+              </a:spcAft>
+              <a:buSzPct val="100000"/>
               <a:buChar char="•"/>
               <a:lnSpc>
                 <a:spcPts val="2200"/>
@@ -26346,10 +26870,12 @@
           </a:bodyPr>
           <a:lstStyle/>
           <a:p>
-            <a:pPr>
-              <a:spcAft>
-                <a:spcPts val="1000"/>
-              </a:spcAft>
+            <a:pPr lvl="0" marL="457200" indent="-228600">
+              <a:buFont typeface="Calibri"/>
+              <a:spcAft>
+                <a:spcPts val="1000"/>
+              </a:spcAft>
+              <a:buSzPct val="100000"/>
               <a:buChar char="•"/>
               <a:lnSpc>
                 <a:spcPts val="2200"/>
@@ -26366,10 +26892,12 @@
             </a:r>
           </a:p>
           <a:p>
-            <a:pPr>
-              <a:spcAft>
-                <a:spcPts val="1000"/>
-              </a:spcAft>
+            <a:pPr lvl="0" marL="457200" indent="-228600">
+              <a:buFont typeface="Calibri"/>
+              <a:spcAft>
+                <a:spcPts val="1000"/>
+              </a:spcAft>
+              <a:buSzPct val="100000"/>
               <a:buChar char="•"/>
               <a:lnSpc>
                 <a:spcPts val="2200"/>
@@ -26386,10 +26914,12 @@
             </a:r>
           </a:p>
           <a:p>
-            <a:pPr>
-              <a:spcAft>
-                <a:spcPts val="1000"/>
-              </a:spcAft>
+            <a:pPr lvl="0" marL="457200" indent="-228600">
+              <a:buFont typeface="Calibri"/>
+              <a:spcAft>
+                <a:spcPts val="1000"/>
+              </a:spcAft>
+              <a:buSzPct val="100000"/>
               <a:buChar char="•"/>
               <a:lnSpc>
                 <a:spcPts val="2200"/>
@@ -26525,10 +27055,12 @@
           </a:bodyPr>
           <a:lstStyle/>
           <a:p>
-            <a:pPr>
-              <a:spcAft>
-                <a:spcPts val="1000"/>
-              </a:spcAft>
+            <a:pPr lvl="0" marL="457200" indent="-228600">
+              <a:buFont typeface="Calibri"/>
+              <a:spcAft>
+                <a:spcPts val="1000"/>
+              </a:spcAft>
+              <a:buSzPct val="100000"/>
               <a:buChar char="•"/>
               <a:lnSpc>
                 <a:spcPts val="2200"/>
@@ -26545,10 +27077,12 @@
             </a:r>
           </a:p>
           <a:p>
-            <a:pPr>
-              <a:spcAft>
-                <a:spcPts val="1000"/>
-              </a:spcAft>
+            <a:pPr lvl="0" marL="457200" indent="-228600">
+              <a:buFont typeface="Calibri"/>
+              <a:spcAft>
+                <a:spcPts val="1000"/>
+              </a:spcAft>
+              <a:buSzPct val="100000"/>
               <a:buChar char="•"/>
               <a:lnSpc>
                 <a:spcPts val="2200"/>
@@ -26565,10 +27099,12 @@
             </a:r>
           </a:p>
           <a:p>
-            <a:pPr>
-              <a:spcAft>
-                <a:spcPts val="1000"/>
-              </a:spcAft>
+            <a:pPr lvl="0" marL="457200" indent="-228600">
+              <a:buFont typeface="Calibri"/>
+              <a:spcAft>
+                <a:spcPts val="1000"/>
+              </a:spcAft>
+              <a:buSzPct val="100000"/>
               <a:buChar char="•"/>
               <a:lnSpc>
                 <a:spcPts val="2200"/>
@@ -26585,10 +27121,12 @@
             </a:r>
           </a:p>
           <a:p>
-            <a:pPr>
-              <a:spcAft>
-                <a:spcPts val="1000"/>
-              </a:spcAft>
+            <a:pPr lvl="0" marL="457200" indent="-228600">
+              <a:buFont typeface="Calibri"/>
+              <a:spcAft>
+                <a:spcPts val="1000"/>
+              </a:spcAft>
+              <a:buSzPct val="100000"/>
               <a:buChar char="•"/>
               <a:lnSpc>
                 <a:spcPts val="2200"/>
@@ -26724,10 +27262,12 @@
           </a:bodyPr>
           <a:lstStyle/>
           <a:p>
-            <a:pPr>
-              <a:spcAft>
-                <a:spcPts val="1000"/>
-              </a:spcAft>
+            <a:pPr lvl="0" marL="457200" indent="-228600">
+              <a:buFont typeface="Calibri"/>
+              <a:spcAft>
+                <a:spcPts val="1000"/>
+              </a:spcAft>
+              <a:buSzPct val="100000"/>
               <a:buChar char="•"/>
               <a:lnSpc>
                 <a:spcPts val="2200"/>
@@ -26744,10 +27284,12 @@
             </a:r>
           </a:p>
           <a:p>
-            <a:pPr>
-              <a:spcAft>
-                <a:spcPts val="1000"/>
-              </a:spcAft>
+            <a:pPr lvl="0" marL="457200" indent="-228600">
+              <a:buFont typeface="Calibri"/>
+              <a:spcAft>
+                <a:spcPts val="1000"/>
+              </a:spcAft>
+              <a:buSzPct val="100000"/>
               <a:buChar char="•"/>
               <a:lnSpc>
                 <a:spcPts val="2200"/>
@@ -26883,10 +27425,12 @@
           </a:bodyPr>
           <a:lstStyle/>
           <a:p>
-            <a:pPr>
-              <a:spcAft>
-                <a:spcPts val="1000"/>
-              </a:spcAft>
+            <a:pPr lvl="0" marL="457200" indent="-228600">
+              <a:buFont typeface="Calibri"/>
+              <a:spcAft>
+                <a:spcPts val="1000"/>
+              </a:spcAft>
+              <a:buSzPct val="100000"/>
               <a:buChar char="•"/>
               <a:lnSpc>
                 <a:spcPts val="2200"/>
@@ -26903,10 +27447,12 @@
             </a:r>
           </a:p>
           <a:p>
-            <a:pPr>
-              <a:spcAft>
-                <a:spcPts val="1000"/>
-              </a:spcAft>
+            <a:pPr lvl="0" marL="457200" indent="-228600">
+              <a:buFont typeface="Calibri"/>
+              <a:spcAft>
+                <a:spcPts val="1000"/>
+              </a:spcAft>
+              <a:buSzPct val="100000"/>
               <a:buChar char="•"/>
               <a:lnSpc>
                 <a:spcPts val="2200"/>
@@ -26923,10 +27469,12 @@
             </a:r>
           </a:p>
           <a:p>
-            <a:pPr>
-              <a:spcAft>
-                <a:spcPts val="1000"/>
-              </a:spcAft>
+            <a:pPr lvl="0" marL="457200" indent="-228600">
+              <a:buFont typeface="Calibri"/>
+              <a:spcAft>
+                <a:spcPts val="1000"/>
+              </a:spcAft>
+              <a:buSzPct val="100000"/>
               <a:buChar char="•"/>
               <a:lnSpc>
                 <a:spcPts val="2200"/>
@@ -27062,10 +27610,12 @@
           </a:bodyPr>
           <a:lstStyle/>
           <a:p>
-            <a:pPr>
-              <a:spcAft>
-                <a:spcPts val="1000"/>
-              </a:spcAft>
+            <a:pPr lvl="0" marL="457200" indent="-228600">
+              <a:buFont typeface="Calibri"/>
+              <a:spcAft>
+                <a:spcPts val="1000"/>
+              </a:spcAft>
+              <a:buSzPct val="100000"/>
               <a:buChar char="•"/>
               <a:lnSpc>
                 <a:spcPts val="2200"/>
@@ -27082,10 +27632,12 @@
             </a:r>
           </a:p>
           <a:p>
-            <a:pPr>
-              <a:spcAft>
-                <a:spcPts val="1000"/>
-              </a:spcAft>
+            <a:pPr lvl="0" marL="457200" indent="-228600">
+              <a:buFont typeface="Calibri"/>
+              <a:spcAft>
+                <a:spcPts val="1000"/>
+              </a:spcAft>
+              <a:buSzPct val="100000"/>
               <a:buChar char="•"/>
               <a:lnSpc>
                 <a:spcPts val="2200"/>
@@ -27102,10 +27654,12 @@
             </a:r>
           </a:p>
           <a:p>
-            <a:pPr>
-              <a:spcAft>
-                <a:spcPts val="1000"/>
-              </a:spcAft>
+            <a:pPr lvl="0" marL="457200" indent="-228600">
+              <a:buFont typeface="Calibri"/>
+              <a:spcAft>
+                <a:spcPts val="1000"/>
+              </a:spcAft>
+              <a:buSzPct val="100000"/>
               <a:buChar char="•"/>
               <a:lnSpc>
                 <a:spcPts val="2200"/>
@@ -27241,10 +27795,12 @@
           </a:bodyPr>
           <a:lstStyle/>
           <a:p>
-            <a:pPr>
-              <a:spcAft>
-                <a:spcPts val="1000"/>
-              </a:spcAft>
+            <a:pPr lvl="0" marL="457200" indent="-228600">
+              <a:buFont typeface="Calibri"/>
+              <a:spcAft>
+                <a:spcPts val="1000"/>
+              </a:spcAft>
+              <a:buSzPct val="100000"/>
               <a:buChar char="•"/>
               <a:lnSpc>
                 <a:spcPts val="2200"/>
@@ -27261,10 +27817,12 @@
             </a:r>
           </a:p>
           <a:p>
-            <a:pPr>
-              <a:spcAft>
-                <a:spcPts val="1000"/>
-              </a:spcAft>
+            <a:pPr lvl="0" marL="457200" indent="-228600">
+              <a:buFont typeface="Calibri"/>
+              <a:spcAft>
+                <a:spcPts val="1000"/>
+              </a:spcAft>
+              <a:buSzPct val="100000"/>
               <a:buChar char="•"/>
               <a:lnSpc>
                 <a:spcPts val="2200"/>
@@ -27281,10 +27839,12 @@
             </a:r>
           </a:p>
           <a:p>
-            <a:pPr>
-              <a:spcAft>
-                <a:spcPts val="1000"/>
-              </a:spcAft>
+            <a:pPr lvl="0" marL="457200" indent="-228600">
+              <a:buFont typeface="Calibri"/>
+              <a:spcAft>
+                <a:spcPts val="1000"/>
+              </a:spcAft>
+              <a:buSzPct val="100000"/>
               <a:buChar char="•"/>
               <a:lnSpc>
                 <a:spcPts val="2200"/>
@@ -27420,10 +27980,12 @@
           </a:bodyPr>
           <a:lstStyle/>
           <a:p>
-            <a:pPr>
-              <a:spcAft>
-                <a:spcPts val="1000"/>
-              </a:spcAft>
+            <a:pPr lvl="0" marL="457200" indent="-228600">
+              <a:buFont typeface="Calibri"/>
+              <a:spcAft>
+                <a:spcPts val="1000"/>
+              </a:spcAft>
+              <a:buSzPct val="100000"/>
               <a:buChar char="•"/>
               <a:lnSpc>
                 <a:spcPts val="2200"/>
@@ -27440,10 +28002,12 @@
             </a:r>
           </a:p>
           <a:p>
-            <a:pPr>
-              <a:spcAft>
-                <a:spcPts val="1000"/>
-              </a:spcAft>
+            <a:pPr lvl="0" marL="457200" indent="-228600">
+              <a:buFont typeface="Calibri"/>
+              <a:spcAft>
+                <a:spcPts val="1000"/>
+              </a:spcAft>
+              <a:buSzPct val="100000"/>
               <a:buChar char="•"/>
               <a:lnSpc>
                 <a:spcPts val="2200"/>
@@ -27460,10 +28024,12 @@
             </a:r>
           </a:p>
           <a:p>
-            <a:pPr>
-              <a:spcAft>
-                <a:spcPts val="1000"/>
-              </a:spcAft>
+            <a:pPr lvl="0" marL="457200" indent="-228600">
+              <a:buFont typeface="Calibri"/>
+              <a:spcAft>
+                <a:spcPts val="1000"/>
+              </a:spcAft>
+              <a:buSzPct val="100000"/>
               <a:buChar char="•"/>
               <a:lnSpc>
                 <a:spcPts val="2200"/>
@@ -27480,10 +28046,12 @@
             </a:r>
           </a:p>
           <a:p>
-            <a:pPr>
-              <a:spcAft>
-                <a:spcPts val="1000"/>
-              </a:spcAft>
+            <a:pPr lvl="0" marL="457200" indent="-228600">
+              <a:buFont typeface="Calibri"/>
+              <a:spcAft>
+                <a:spcPts val="1000"/>
+              </a:spcAft>
+              <a:buSzPct val="100000"/>
               <a:buChar char="•"/>
               <a:lnSpc>
                 <a:spcPts val="2200"/>
@@ -27619,10 +28187,12 @@
           </a:bodyPr>
           <a:lstStyle/>
           <a:p>
-            <a:pPr>
-              <a:spcAft>
-                <a:spcPts val="1000"/>
-              </a:spcAft>
+            <a:pPr lvl="0" marL="457200" indent="-228600">
+              <a:buFont typeface="Calibri"/>
+              <a:spcAft>
+                <a:spcPts val="1000"/>
+              </a:spcAft>
+              <a:buSzPct val="100000"/>
               <a:buChar char="•"/>
               <a:lnSpc>
                 <a:spcPts val="2200"/>
@@ -27639,10 +28209,12 @@
             </a:r>
           </a:p>
           <a:p>
-            <a:pPr>
-              <a:spcAft>
-                <a:spcPts val="1000"/>
-              </a:spcAft>
+            <a:pPr lvl="0" marL="457200" indent="-228600">
+              <a:buFont typeface="Calibri"/>
+              <a:spcAft>
+                <a:spcPts val="1000"/>
+              </a:spcAft>
+              <a:buSzPct val="100000"/>
               <a:buChar char="•"/>
               <a:lnSpc>
                 <a:spcPts val="2200"/>
@@ -27778,10 +28350,12 @@
           </a:bodyPr>
           <a:lstStyle/>
           <a:p>
-            <a:pPr>
-              <a:spcAft>
-                <a:spcPts val="1000"/>
-              </a:spcAft>
+            <a:pPr lvl="0" marL="457200" indent="-228600">
+              <a:buFont typeface="Calibri"/>
+              <a:spcAft>
+                <a:spcPts val="1000"/>
+              </a:spcAft>
+              <a:buSzPct val="100000"/>
               <a:buChar char="•"/>
               <a:lnSpc>
                 <a:spcPts val="2200"/>
@@ -27917,10 +28491,12 @@
           </a:bodyPr>
           <a:lstStyle/>
           <a:p>
-            <a:pPr>
-              <a:spcAft>
-                <a:spcPts val="1000"/>
-              </a:spcAft>
+            <a:pPr lvl="0" marL="457200" indent="-228600">
+              <a:buFont typeface="Calibri"/>
+              <a:spcAft>
+                <a:spcPts val="1000"/>
+              </a:spcAft>
+              <a:buSzPct val="100000"/>
               <a:buChar char="•"/>
               <a:lnSpc>
                 <a:spcPts val="2200"/>
@@ -27937,10 +28513,12 @@
             </a:r>
           </a:p>
           <a:p>
-            <a:pPr>
-              <a:spcAft>
-                <a:spcPts val="1000"/>
-              </a:spcAft>
+            <a:pPr lvl="0" marL="457200" indent="-228600">
+              <a:buFont typeface="Calibri"/>
+              <a:spcAft>
+                <a:spcPts val="1000"/>
+              </a:spcAft>
+              <a:buSzPct val="100000"/>
               <a:buChar char="•"/>
               <a:lnSpc>
                 <a:spcPts val="2200"/>
@@ -27957,10 +28535,12 @@
             </a:r>
           </a:p>
           <a:p>
-            <a:pPr>
-              <a:spcAft>
-                <a:spcPts val="1000"/>
-              </a:spcAft>
+            <a:pPr lvl="0" marL="457200" indent="-228600">
+              <a:buFont typeface="Calibri"/>
+              <a:spcAft>
+                <a:spcPts val="1000"/>
+              </a:spcAft>
+              <a:buSzPct val="100000"/>
               <a:buChar char="•"/>
               <a:lnSpc>
                 <a:spcPts val="2200"/>
@@ -28096,10 +28676,12 @@
           </a:bodyPr>
           <a:lstStyle/>
           <a:p>
-            <a:pPr>
-              <a:spcAft>
-                <a:spcPts val="1000"/>
-              </a:spcAft>
+            <a:pPr lvl="0" marL="457200" indent="-228600">
+              <a:buFont typeface="Calibri"/>
+              <a:spcAft>
+                <a:spcPts val="1000"/>
+              </a:spcAft>
+              <a:buSzPct val="100000"/>
               <a:buChar char="•"/>
               <a:lnSpc>
                 <a:spcPts val="2200"/>
@@ -28116,10 +28698,12 @@
             </a:r>
           </a:p>
           <a:p>
-            <a:pPr>
-              <a:spcAft>
-                <a:spcPts val="1000"/>
-              </a:spcAft>
+            <a:pPr lvl="0" marL="457200" indent="-228600">
+              <a:buFont typeface="Calibri"/>
+              <a:spcAft>
+                <a:spcPts val="1000"/>
+              </a:spcAft>
+              <a:buSzPct val="100000"/>
               <a:buChar char="•"/>
               <a:lnSpc>
                 <a:spcPts val="2200"/>
@@ -28136,10 +28720,12 @@
             </a:r>
           </a:p>
           <a:p>
-            <a:pPr>
-              <a:spcAft>
-                <a:spcPts val="1000"/>
-              </a:spcAft>
+            <a:pPr lvl="0" marL="457200" indent="-228600">
+              <a:buFont typeface="Calibri"/>
+              <a:spcAft>
+                <a:spcPts val="1000"/>
+              </a:spcAft>
+              <a:buSzPct val="100000"/>
               <a:buChar char="•"/>
               <a:lnSpc>
                 <a:spcPts val="2200"/>
@@ -28275,10 +28861,12 @@
           </a:bodyPr>
           <a:lstStyle/>
           <a:p>
-            <a:pPr>
-              <a:spcAft>
-                <a:spcPts val="1000"/>
-              </a:spcAft>
+            <a:pPr lvl="0" marL="457200" indent="-228600">
+              <a:buFont typeface="Calibri"/>
+              <a:spcAft>
+                <a:spcPts val="1000"/>
+              </a:spcAft>
+              <a:buSzPct val="100000"/>
               <a:buChar char="•"/>
               <a:lnSpc>
                 <a:spcPts val="2200"/>
@@ -28295,10 +28883,12 @@
             </a:r>
           </a:p>
           <a:p>
-            <a:pPr>
-              <a:spcAft>
-                <a:spcPts val="1000"/>
-              </a:spcAft>
+            <a:pPr lvl="0" marL="457200" indent="-228600">
+              <a:buFont typeface="Calibri"/>
+              <a:spcAft>
+                <a:spcPts val="1000"/>
+              </a:spcAft>
+              <a:buSzPct val="100000"/>
               <a:buChar char="•"/>
               <a:lnSpc>
                 <a:spcPts val="2200"/>
@@ -28315,10 +28905,12 @@
             </a:r>
           </a:p>
           <a:p>
-            <a:pPr>
-              <a:spcAft>
-                <a:spcPts val="1000"/>
-              </a:spcAft>
+            <a:pPr lvl="0" marL="457200" indent="-228600">
+              <a:buFont typeface="Calibri"/>
+              <a:spcAft>
+                <a:spcPts val="1000"/>
+              </a:spcAft>
+              <a:buSzPct val="100000"/>
               <a:buChar char="•"/>
               <a:lnSpc>
                 <a:spcPts val="2200"/>
@@ -28454,10 +29046,12 @@
           </a:bodyPr>
           <a:lstStyle/>
           <a:p>
-            <a:pPr>
-              <a:spcAft>
-                <a:spcPts val="1000"/>
-              </a:spcAft>
+            <a:pPr lvl="0" marL="457200" indent="-228600">
+              <a:buFont typeface="Calibri"/>
+              <a:spcAft>
+                <a:spcPts val="1000"/>
+              </a:spcAft>
+              <a:buSzPct val="100000"/>
               <a:buChar char="•"/>
               <a:lnSpc>
                 <a:spcPts val="2200"/>
@@ -28474,10 +29068,12 @@
             </a:r>
           </a:p>
           <a:p>
-            <a:pPr>
-              <a:spcAft>
-                <a:spcPts val="1000"/>
-              </a:spcAft>
+            <a:pPr lvl="0" marL="457200" indent="-228600">
+              <a:buFont typeface="Calibri"/>
+              <a:spcAft>
+                <a:spcPts val="1000"/>
+              </a:spcAft>
+              <a:buSzPct val="100000"/>
               <a:buChar char="•"/>
               <a:lnSpc>
                 <a:spcPts val="2200"/>
@@ -28494,10 +29090,12 @@
             </a:r>
           </a:p>
           <a:p>
-            <a:pPr>
-              <a:spcAft>
-                <a:spcPts val="1000"/>
-              </a:spcAft>
+            <a:pPr lvl="0" marL="457200" indent="-228600">
+              <a:buFont typeface="Calibri"/>
+              <a:spcAft>
+                <a:spcPts val="1000"/>
+              </a:spcAft>
+              <a:buSzPct val="100000"/>
               <a:buChar char="•"/>
               <a:lnSpc>
                 <a:spcPts val="2200"/>
@@ -28633,10 +29231,12 @@
           </a:bodyPr>
           <a:lstStyle/>
           <a:p>
-            <a:pPr>
-              <a:spcAft>
-                <a:spcPts val="1000"/>
-              </a:spcAft>
+            <a:pPr lvl="0" marL="457200" indent="-228600">
+              <a:buFont typeface="Calibri"/>
+              <a:spcAft>
+                <a:spcPts val="1000"/>
+              </a:spcAft>
+              <a:buSzPct val="100000"/>
               <a:buChar char="•"/>
               <a:lnSpc>
                 <a:spcPts val="2200"/>
@@ -28653,10 +29253,12 @@
             </a:r>
           </a:p>
           <a:p>
-            <a:pPr>
-              <a:spcAft>
-                <a:spcPts val="1000"/>
-              </a:spcAft>
+            <a:pPr lvl="0" marL="457200" indent="-228600">
+              <a:buFont typeface="Calibri"/>
+              <a:spcAft>
+                <a:spcPts val="1000"/>
+              </a:spcAft>
+              <a:buSzPct val="100000"/>
               <a:buChar char="•"/>
               <a:lnSpc>
                 <a:spcPts val="2200"/>
@@ -28792,10 +29394,12 @@
           </a:bodyPr>
           <a:lstStyle/>
           <a:p>
-            <a:pPr>
-              <a:spcAft>
-                <a:spcPts val="1000"/>
-              </a:spcAft>
+            <a:pPr lvl="0" marL="457200" indent="-228600">
+              <a:buFont typeface="Calibri"/>
+              <a:spcAft>
+                <a:spcPts val="1000"/>
+              </a:spcAft>
+              <a:buSzPct val="100000"/>
               <a:buChar char="•"/>
               <a:lnSpc>
                 <a:spcPts val="2200"/>
@@ -28812,10 +29416,12 @@
             </a:r>
           </a:p>
           <a:p>
-            <a:pPr>
-              <a:spcAft>
-                <a:spcPts val="1000"/>
-              </a:spcAft>
+            <a:pPr lvl="0" marL="457200" indent="-228600">
+              <a:buFont typeface="Calibri"/>
+              <a:spcAft>
+                <a:spcPts val="1000"/>
+              </a:spcAft>
+              <a:buSzPct val="100000"/>
               <a:buChar char="•"/>
               <a:lnSpc>
                 <a:spcPts val="2200"/>
@@ -28832,10 +29438,12 @@
             </a:r>
           </a:p>
           <a:p>
-            <a:pPr>
-              <a:spcAft>
-                <a:spcPts val="1000"/>
-              </a:spcAft>
+            <a:pPr lvl="0" marL="457200" indent="-228600">
+              <a:buFont typeface="Calibri"/>
+              <a:spcAft>
+                <a:spcPts val="1000"/>
+              </a:spcAft>
+              <a:buSzPct val="100000"/>
               <a:buChar char="•"/>
               <a:lnSpc>
                 <a:spcPts val="2200"/>
@@ -28971,10 +29579,12 @@
           </a:bodyPr>
           <a:lstStyle/>
           <a:p>
-            <a:pPr>
-              <a:spcAft>
-                <a:spcPts val="1000"/>
-              </a:spcAft>
+            <a:pPr lvl="0" marL="457200" indent="-228600">
+              <a:buFont typeface="Calibri"/>
+              <a:spcAft>
+                <a:spcPts val="1000"/>
+              </a:spcAft>
+              <a:buSzPct val="100000"/>
               <a:buChar char="•"/>
               <a:lnSpc>
                 <a:spcPts val="2200"/>
@@ -28991,10 +29601,12 @@
             </a:r>
           </a:p>
           <a:p>
-            <a:pPr>
-              <a:spcAft>
-                <a:spcPts val="1000"/>
-              </a:spcAft>
+            <a:pPr lvl="0" marL="457200" indent="-228600">
+              <a:buFont typeface="Calibri"/>
+              <a:spcAft>
+                <a:spcPts val="1000"/>
+              </a:spcAft>
+              <a:buSzPct val="100000"/>
               <a:buChar char="•"/>
               <a:lnSpc>
                 <a:spcPts val="2200"/>
@@ -29011,10 +29623,12 @@
             </a:r>
           </a:p>
           <a:p>
-            <a:pPr>
-              <a:spcAft>
-                <a:spcPts val="1000"/>
-              </a:spcAft>
+            <a:pPr lvl="0" marL="457200" indent="-228600">
+              <a:buFont typeface="Calibri"/>
+              <a:spcAft>
+                <a:spcPts val="1000"/>
+              </a:spcAft>
+              <a:buSzPct val="100000"/>
               <a:buChar char="•"/>
               <a:lnSpc>
                 <a:spcPts val="2200"/>
@@ -29031,10 +29645,12 @@
             </a:r>
           </a:p>
           <a:p>
-            <a:pPr>
-              <a:spcAft>
-                <a:spcPts val="1000"/>
-              </a:spcAft>
+            <a:pPr lvl="0" marL="457200" indent="-228600">
+              <a:buFont typeface="Calibri"/>
+              <a:spcAft>
+                <a:spcPts val="1000"/>
+              </a:spcAft>
+              <a:buSzPct val="100000"/>
               <a:buChar char="•"/>
               <a:lnSpc>
                 <a:spcPts val="2200"/>
@@ -29170,10 +29786,12 @@
           </a:bodyPr>
           <a:lstStyle/>
           <a:p>
-            <a:pPr>
-              <a:spcAft>
-                <a:spcPts val="1000"/>
-              </a:spcAft>
+            <a:pPr lvl="0" marL="457200" indent="-228600">
+              <a:buFont typeface="Calibri"/>
+              <a:spcAft>
+                <a:spcPts val="1000"/>
+              </a:spcAft>
+              <a:buSzPct val="100000"/>
               <a:buChar char="•"/>
               <a:lnSpc>
                 <a:spcPts val="2200"/>
@@ -29190,10 +29808,12 @@
             </a:r>
           </a:p>
           <a:p>
-            <a:pPr>
-              <a:spcAft>
-                <a:spcPts val="1000"/>
-              </a:spcAft>
+            <a:pPr lvl="0" marL="457200" indent="-228600">
+              <a:buFont typeface="Calibri"/>
+              <a:spcAft>
+                <a:spcPts val="1000"/>
+              </a:spcAft>
+              <a:buSzPct val="100000"/>
               <a:buChar char="•"/>
               <a:lnSpc>
                 <a:spcPts val="2200"/>
